--- a/SHRESHTA_Presentation_Slides_v2.pptx
+++ b/SHRESHTA_Presentation_Slides_v2.pptx
@@ -2552,7 +2552,7 @@
 </file>
 
 <file path=ppt/diagrams/colors4.xml><?xml version="1.0" encoding="utf-8"?>
-<dgm:colorsDef xmlns:dgm="http://schemas.openxmlformats.org/drawingml/2006/diagram" xmlns:a="http://schemas.openxmlformats.org/drawingml/2006/main" uniqueId="urn:microsoft.com/office/officeart/2018/5/colors/Iconchunking_neutralicontext_colorful1">
+<dgm:colorsDef xmlns:dgm="http://schemas.openxmlformats.org/drawingml/2006/diagram" xmlns:a="http://schemas.openxmlformats.org/drawingml/2006/main" uniqueId="urn:microsoft.com/office/officeart/2005/8/colors/colorful1">
   <dgm:title val=""/>
   <dgm:desc val=""/>
   <dgm:catLst>
@@ -2572,18 +2572,18 @@
   </dgm:styleLbl>
   <dgm:styleLbl name="node1">
     <dgm:fillClrLst meth="repeat">
-      <a:schemeClr val="bg1"/>
+      <a:schemeClr val="accent2"/>
+      <a:schemeClr val="accent3"/>
+      <a:schemeClr val="accent4"/>
+      <a:schemeClr val="accent5"/>
+      <a:schemeClr val="accent6"/>
     </dgm:fillClrLst>
     <dgm:linClrLst meth="repeat">
-      <a:schemeClr val="lt1">
-        <a:alpha val="0"/>
-      </a:schemeClr>
+      <a:schemeClr val="lt1"/>
     </dgm:linClrLst>
     <dgm:effectClrLst/>
     <dgm:txLinClrLst/>
-    <dgm:txFillClrLst meth="repeat">
-      <a:schemeClr val="dk1"/>
-    </dgm:txFillClrLst>
+    <dgm:txFillClrLst/>
     <dgm:txEffectClrLst/>
   </dgm:styleLbl>
   <dgm:styleLbl name="alignNode1">
@@ -3386,20 +3386,18 @@
   </dgm:styleLbl>
   <dgm:styleLbl name="bgShp">
     <dgm:fillClrLst meth="repeat">
-      <a:schemeClr val="accent2"/>
-      <a:schemeClr val="accent3"/>
-      <a:schemeClr val="accent4"/>
-      <a:schemeClr val="accent5"/>
-      <a:schemeClr val="accent6"/>
+      <a:schemeClr val="accent2">
+        <a:tint val="40000"/>
+      </a:schemeClr>
     </dgm:fillClrLst>
     <dgm:linClrLst meth="repeat">
-      <a:schemeClr val="lt1">
-        <a:alpha val="0"/>
-      </a:schemeClr>
+      <a:schemeClr val="dk1"/>
     </dgm:linClrLst>
     <dgm:effectClrLst/>
     <dgm:txLinClrLst/>
-    <dgm:txFillClrLst/>
+    <dgm:txFillClrLst meth="repeat">
+      <a:schemeClr val="dk1"/>
+    </dgm:txFillClrLst>
     <dgm:txEffectClrLst/>
   </dgm:styleLbl>
   <dgm:styleLbl name="dkBgShp">
@@ -3465,7 +3463,7 @@
     <dgm:effectClrLst/>
     <dgm:txLinClrLst/>
     <dgm:txFillClrLst meth="repeat">
-      <a:schemeClr val="bg1"/>
+      <a:schemeClr val="tx1"/>
     </dgm:txFillClrLst>
     <dgm:txEffectClrLst/>
   </dgm:styleLbl>
@@ -5649,52 +5647,6 @@
         </a:p>
       </dgm:t>
     </dgm:pt>
-    <dgm:pt modelId="{BD533944-7BA2-4335-AF97-2B385FAEF3B5}">
-      <dgm:prSet/>
-      <dgm:spPr/>
-      <dgm:t>
-        <a:bodyPr/>
-        <a:lstStyle/>
-        <a:p>
-          <a:pPr>
-            <a:lnSpc>
-              <a:spcPct val="100000"/>
-            </a:lnSpc>
-          </a:pPr>
-          <a:r>
-            <a:rPr lang="en-US"/>
-            <a:t>The Problem: Hosting large-scale inter-collegiate fests involves massive logistical hurdles—long queues, paper tracking, manual verification, and delayed certificates.</a:t>
-          </a:r>
-        </a:p>
-      </dgm:t>
-    </dgm:pt>
-    <dgm:pt modelId="{0423B6C5-9F9E-4AC8-9516-9A051CA39C36}" type="parTrans" cxnId="{EC2408D3-C9D6-4E26-9940-D2A1B13C84F5}">
-      <dgm:prSet/>
-      <dgm:spPr/>
-      <dgm:t>
-        <a:bodyPr/>
-        <a:lstStyle/>
-        <a:p>
-          <a:endParaRPr lang="en-US"/>
-        </a:p>
-      </dgm:t>
-    </dgm:pt>
-    <dgm:pt modelId="{CDF317BF-2CA9-4C0B-9653-4B7B5BC97911}" type="sibTrans" cxnId="{EC2408D3-C9D6-4E26-9940-D2A1B13C84F5}">
-      <dgm:prSet/>
-      <dgm:spPr/>
-      <dgm:t>
-        <a:bodyPr/>
-        <a:lstStyle/>
-        <a:p>
-          <a:pPr>
-            <a:lnSpc>
-              <a:spcPct val="100000"/>
-            </a:lnSpc>
-          </a:pPr>
-          <a:endParaRPr lang="en-US"/>
-        </a:p>
-      </dgm:t>
-    </dgm:pt>
     <dgm:pt modelId="{A7DCE5A0-80FE-4825-89DA-C5CB71D8526C}">
       <dgm:prSet/>
       <dgm:spPr/>
@@ -5708,7 +5660,7 @@
             </a:lnSpc>
           </a:pPr>
           <a:r>
-            <a:rPr lang="en-US"/>
+            <a:rPr lang="en-US" dirty="0"/>
             <a:t>The Solution: We developed SHRESHTA to completely digitalize and streamline workflows autonomously.</a:t>
           </a:r>
         </a:p>
@@ -5818,6 +5770,52 @@
       </dgm:t>
     </dgm:pt>
     <dgm:pt modelId="{E7643731-034D-4673-B738-552C86158569}" type="sibTrans" cxnId="{73F98FE7-1E3A-40B0-92B7-317D6D300357}">
+      <dgm:prSet/>
+      <dgm:spPr/>
+      <dgm:t>
+        <a:bodyPr/>
+        <a:lstStyle/>
+        <a:p>
+          <a:endParaRPr lang="en-US"/>
+        </a:p>
+      </dgm:t>
+    </dgm:pt>
+    <dgm:pt modelId="{BD533944-7BA2-4335-AF97-2B385FAEF3B5}">
+      <dgm:prSet/>
+      <dgm:spPr/>
+      <dgm:t>
+        <a:bodyPr/>
+        <a:lstStyle/>
+        <a:p>
+          <a:pPr>
+            <a:lnSpc>
+              <a:spcPct val="100000"/>
+            </a:lnSpc>
+          </a:pPr>
+          <a:r>
+            <a:rPr lang="en-US" dirty="0"/>
+            <a:t>The Problem: Hosting large-scale inter-collegiate fests involves massive logistical hurdles—long queues, paper tracking, manual verification, and delayed certificates.</a:t>
+          </a:r>
+        </a:p>
+      </dgm:t>
+    </dgm:pt>
+    <dgm:pt modelId="{CDF317BF-2CA9-4C0B-9653-4B7B5BC97911}" type="sibTrans" cxnId="{EC2408D3-C9D6-4E26-9940-D2A1B13C84F5}">
+      <dgm:prSet/>
+      <dgm:spPr/>
+      <dgm:t>
+        <a:bodyPr/>
+        <a:lstStyle/>
+        <a:p>
+          <a:pPr>
+            <a:lnSpc>
+              <a:spcPct val="100000"/>
+            </a:lnSpc>
+          </a:pPr>
+          <a:endParaRPr lang="en-US"/>
+        </a:p>
+      </dgm:t>
+    </dgm:pt>
+    <dgm:pt modelId="{0423B6C5-9F9E-4AC8-9516-9A051CA39C36}" type="parTrans" cxnId="{EC2408D3-C9D6-4E26-9940-D2A1B13C84F5}">
       <dgm:prSet/>
       <dgm:spPr/>
       <dgm:t>
@@ -6321,7 +6319,7 @@
 <dgm:dataModel xmlns:dgm="http://schemas.openxmlformats.org/drawingml/2006/diagram" xmlns:a="http://schemas.openxmlformats.org/drawingml/2006/main">
   <dgm:ptLst>
     <dgm:pt modelId="{CBE1E850-E891-47BC-8D60-1E59EF37442C}" type="doc">
-      <dgm:prSet loTypeId="urn:microsoft.com/office/officeart/2018/2/layout/IconVerticalSolidList" loCatId="icon" qsTypeId="urn:microsoft.com/office/officeart/2005/8/quickstyle/simple1" qsCatId="simple" csTypeId="urn:microsoft.com/office/officeart/2018/5/colors/Iconchunking_neutralicontext_colorful1" csCatId="colorful" phldr="1"/>
+      <dgm:prSet loTypeId="urn:microsoft.com/office/officeart/2016/7/layout/RepeatingBendingProcessNew" loCatId="process" qsTypeId="urn:microsoft.com/office/officeart/2005/8/quickstyle/simple1" qsCatId="simple" csTypeId="urn:microsoft.com/office/officeart/2005/8/colors/colorful1" csCatId="colorful" phldr="1"/>
       <dgm:spPr/>
       <dgm:t>
         <a:bodyPr/>
@@ -6338,6 +6336,11 @@
         <a:bodyPr/>
         <a:lstStyle/>
         <a:p>
+          <a:pPr>
+            <a:lnSpc>
+              <a:spcPct val="100000"/>
+            </a:lnSpc>
+          </a:pPr>
           <a:r>
             <a:rPr lang="en-US"/>
             <a:t>1. Eliminate Paper Trails: Store 100% of registrations on secured cloud.</a:t>
@@ -6374,6 +6377,11 @@
         <a:bodyPr/>
         <a:lstStyle/>
         <a:p>
+          <a:pPr>
+            <a:lnSpc>
+              <a:spcPct val="100000"/>
+            </a:lnSpc>
+          </a:pPr>
           <a:r>
             <a:rPr lang="en-US"/>
             <a:t>2. Optimize Check-in Efficiency: Dramatically cut queue times.</a:t>
@@ -6410,6 +6418,11 @@
         <a:bodyPr/>
         <a:lstStyle/>
         <a:p>
+          <a:pPr>
+            <a:lnSpc>
+              <a:spcPct val="100000"/>
+            </a:lnSpc>
+          </a:pPr>
           <a:r>
             <a:rPr lang="en-US"/>
             <a:t>3. Automate Validations: Establish a flawless digital payment (UTR) workflow.</a:t>
@@ -6446,6 +6459,11 @@
         <a:bodyPr/>
         <a:lstStyle/>
         <a:p>
+          <a:pPr>
+            <a:lnSpc>
+              <a:spcPct val="100000"/>
+            </a:lnSpc>
+          </a:pPr>
           <a:r>
             <a:rPr lang="en-US"/>
             <a:t>4. Zero-Touch Rewards: Overlay names algorithmically for certificates.</a:t>
@@ -6482,6 +6500,11 @@
         <a:bodyPr/>
         <a:lstStyle/>
         <a:p>
+          <a:pPr>
+            <a:lnSpc>
+              <a:spcPct val="100000"/>
+            </a:lnSpc>
+          </a:pPr>
           <a:r>
             <a:rPr lang="en-US"/>
             <a:t>5. Provide Real-Time Analytics via strict RBAC.</a:t>
@@ -6511,8 +6534,8 @@
         </a:p>
       </dgm:t>
     </dgm:pt>
-    <dgm:pt modelId="{F3545DE9-6C72-465F-957B-491E4D6DF75B}" type="pres">
-      <dgm:prSet presAssocID="{CBE1E850-E891-47BC-8D60-1E59EF37442C}" presName="root" presStyleCnt="0">
+    <dgm:pt modelId="{A1AC4010-720A-4D7E-B89F-EAD839E1F064}" type="pres">
+      <dgm:prSet presAssocID="{CBE1E850-E891-47BC-8D60-1E59EF37442C}" presName="Name0" presStyleCnt="0">
         <dgm:presLayoutVars>
           <dgm:dir/>
           <dgm:resizeHandles val="exact"/>
@@ -6520,263 +6543,74 @@
       </dgm:prSet>
       <dgm:spPr/>
     </dgm:pt>
-    <dgm:pt modelId="{346AA22F-73CA-4769-8A47-7B097D23781A}" type="pres">
-      <dgm:prSet presAssocID="{CBEE00FA-0E1B-4413-BE1D-143273DFF0FD}" presName="compNode" presStyleCnt="0"/>
-      <dgm:spPr/>
-    </dgm:pt>
-    <dgm:pt modelId="{AE19D319-96C3-4A19-A101-FFB7C34D8DEC}" type="pres">
-      <dgm:prSet presAssocID="{CBEE00FA-0E1B-4413-BE1D-143273DFF0FD}" presName="bgRect" presStyleLbl="bgShp" presStyleIdx="0" presStyleCnt="5"/>
-      <dgm:spPr/>
-    </dgm:pt>
-    <dgm:pt modelId="{8E9465D8-37A0-455A-955B-D662A8DA272E}" type="pres">
-      <dgm:prSet presAssocID="{CBEE00FA-0E1B-4413-BE1D-143273DFF0FD}" presName="iconRect" presStyleLbl="node1" presStyleIdx="0" presStyleCnt="5"/>
-      <dgm:spPr>
-        <a:blipFill>
-          <a:blip xmlns:r="http://schemas.openxmlformats.org/officeDocument/2006/relationships">
-            <a:extLst>
-              <a:ext uri="{28A0092B-C50C-407E-A947-70E740481C1C}">
-                <a14:useLocalDpi xmlns:a14="http://schemas.microsoft.com/office/drawing/2010/main" val="0"/>
-              </a:ext>
-              <a:ext uri="{96DAC541-7B7A-43D3-8B79-37D633B846F1}">
-                <asvg:svgBlip xmlns:asvg="http://schemas.microsoft.com/office/drawing/2016/SVG/main" r:embed="rId1"/>
-              </a:ext>
-            </a:extLst>
-          </a:blip>
-          <a:stretch>
-            <a:fillRect/>
-          </a:stretch>
-        </a:blipFill>
-        <a:ln>
-          <a:noFill/>
-        </a:ln>
-      </dgm:spPr>
-      <dgm:extLst>
-        <a:ext uri="{E40237B7-FDA0-4F09-8148-C483321AD2D9}">
-          <dgm14:cNvPr xmlns:dgm14="http://schemas.microsoft.com/office/drawing/2010/diagram" id="0" name="" descr="Paper"/>
-        </a:ext>
-      </dgm:extLst>
-    </dgm:pt>
-    <dgm:pt modelId="{F4149086-2C9B-4A7A-864F-2047C4120EB1}" type="pres">
-      <dgm:prSet presAssocID="{CBEE00FA-0E1B-4413-BE1D-143273DFF0FD}" presName="spaceRect" presStyleCnt="0"/>
-      <dgm:spPr/>
-    </dgm:pt>
-    <dgm:pt modelId="{1E1104BA-F754-4D5C-9044-A51181849552}" type="pres">
-      <dgm:prSet presAssocID="{CBEE00FA-0E1B-4413-BE1D-143273DFF0FD}" presName="parTx" presStyleLbl="revTx" presStyleIdx="0" presStyleCnt="5">
+    <dgm:pt modelId="{0F85D474-B93C-418B-A4A4-CE483A41C0A2}" type="pres">
+      <dgm:prSet presAssocID="{CBEE00FA-0E1B-4413-BE1D-143273DFF0FD}" presName="node" presStyleLbl="node1" presStyleIdx="0" presStyleCnt="5">
         <dgm:presLayoutVars>
-          <dgm:chMax val="0"/>
-          <dgm:chPref val="0"/>
+          <dgm:bulletEnabled val="1"/>
         </dgm:presLayoutVars>
       </dgm:prSet>
       <dgm:spPr/>
     </dgm:pt>
-    <dgm:pt modelId="{4262C22B-DA63-448F-A16C-87EE3C92D4A0}" type="pres">
-      <dgm:prSet presAssocID="{69800547-0F76-4D24-A978-09DC51D885A1}" presName="sibTrans" presStyleCnt="0"/>
+    <dgm:pt modelId="{4FD897F3-C0D1-4D06-BB8E-6F23DF97D5B4}" type="pres">
+      <dgm:prSet presAssocID="{69800547-0F76-4D24-A978-09DC51D885A1}" presName="sibTrans" presStyleLbl="sibTrans1D1" presStyleIdx="0" presStyleCnt="4"/>
       <dgm:spPr/>
     </dgm:pt>
-    <dgm:pt modelId="{E7DBA843-481B-4367-9DF8-DCE86998C96F}" type="pres">
-      <dgm:prSet presAssocID="{BEA3EC9E-6FBB-48EC-ACEA-939DF9AB046A}" presName="compNode" presStyleCnt="0"/>
+    <dgm:pt modelId="{B7E5BD02-6794-4E23-B4F1-56FA7F62A23D}" type="pres">
+      <dgm:prSet presAssocID="{69800547-0F76-4D24-A978-09DC51D885A1}" presName="connectorText" presStyleLbl="sibTrans1D1" presStyleIdx="0" presStyleCnt="4"/>
       <dgm:spPr/>
     </dgm:pt>
-    <dgm:pt modelId="{5A79B7A7-F09F-4928-BC2F-03E2E132C5FA}" type="pres">
-      <dgm:prSet presAssocID="{BEA3EC9E-6FBB-48EC-ACEA-939DF9AB046A}" presName="bgRect" presStyleLbl="bgShp" presStyleIdx="1" presStyleCnt="5"/>
-      <dgm:spPr/>
-    </dgm:pt>
-    <dgm:pt modelId="{E4A571BB-2629-4794-B99D-2445677D8064}" type="pres">
-      <dgm:prSet presAssocID="{BEA3EC9E-6FBB-48EC-ACEA-939DF9AB046A}" presName="iconRect" presStyleLbl="node1" presStyleIdx="1" presStyleCnt="5"/>
-      <dgm:spPr>
-        <a:blipFill>
-          <a:blip xmlns:r="http://schemas.openxmlformats.org/officeDocument/2006/relationships">
-            <a:extLst>
-              <a:ext uri="{28A0092B-C50C-407E-A947-70E740481C1C}">
-                <a14:useLocalDpi xmlns:a14="http://schemas.microsoft.com/office/drawing/2010/main" val="0"/>
-              </a:ext>
-              <a:ext uri="{96DAC541-7B7A-43D3-8B79-37D633B846F1}">
-                <asvg:svgBlip xmlns:asvg="http://schemas.microsoft.com/office/drawing/2016/SVG/main" r:embed="rId2"/>
-              </a:ext>
-            </a:extLst>
-          </a:blip>
-          <a:stretch>
-            <a:fillRect/>
-          </a:stretch>
-        </a:blipFill>
-        <a:ln>
-          <a:noFill/>
-        </a:ln>
-      </dgm:spPr>
-      <dgm:extLst>
-        <a:ext uri="{E40237B7-FDA0-4F09-8148-C483321AD2D9}">
-          <dgm14:cNvPr xmlns:dgm14="http://schemas.microsoft.com/office/drawing/2010/diagram" id="0" name="" descr="Stopwatch"/>
-        </a:ext>
-      </dgm:extLst>
-    </dgm:pt>
-    <dgm:pt modelId="{5671766D-0AD5-4304-A1B4-AD28DF1E04AB}" type="pres">
-      <dgm:prSet presAssocID="{BEA3EC9E-6FBB-48EC-ACEA-939DF9AB046A}" presName="spaceRect" presStyleCnt="0"/>
-      <dgm:spPr/>
-    </dgm:pt>
-    <dgm:pt modelId="{FD55D884-7680-49DF-A13F-8045DC9CA1C3}" type="pres">
-      <dgm:prSet presAssocID="{BEA3EC9E-6FBB-48EC-ACEA-939DF9AB046A}" presName="parTx" presStyleLbl="revTx" presStyleIdx="1" presStyleCnt="5">
+    <dgm:pt modelId="{8A589B51-1154-4174-8272-2DA394768254}" type="pres">
+      <dgm:prSet presAssocID="{BEA3EC9E-6FBB-48EC-ACEA-939DF9AB046A}" presName="node" presStyleLbl="node1" presStyleIdx="1" presStyleCnt="5">
         <dgm:presLayoutVars>
-          <dgm:chMax val="0"/>
-          <dgm:chPref val="0"/>
+          <dgm:bulletEnabled val="1"/>
         </dgm:presLayoutVars>
       </dgm:prSet>
       <dgm:spPr/>
     </dgm:pt>
-    <dgm:pt modelId="{976A327A-EDCF-491E-B071-B03F7F31CE2E}" type="pres">
-      <dgm:prSet presAssocID="{3DB9BA6E-D348-4530-B79D-B5936B8B8AF6}" presName="sibTrans" presStyleCnt="0"/>
+    <dgm:pt modelId="{1D22B376-BEB5-423D-8093-9725192FE0A2}" type="pres">
+      <dgm:prSet presAssocID="{3DB9BA6E-D348-4530-B79D-B5936B8B8AF6}" presName="sibTrans" presStyleLbl="sibTrans1D1" presStyleIdx="1" presStyleCnt="4"/>
       <dgm:spPr/>
     </dgm:pt>
-    <dgm:pt modelId="{46AC3FDB-FCDA-4251-93F2-CAAC53B1C0EE}" type="pres">
-      <dgm:prSet presAssocID="{074FB2D2-A3F3-4C6A-87EA-212677A761D7}" presName="compNode" presStyleCnt="0"/>
+    <dgm:pt modelId="{2B387C8C-7DC2-4063-9877-E39C8530DEA9}" type="pres">
+      <dgm:prSet presAssocID="{3DB9BA6E-D348-4530-B79D-B5936B8B8AF6}" presName="connectorText" presStyleLbl="sibTrans1D1" presStyleIdx="1" presStyleCnt="4"/>
       <dgm:spPr/>
     </dgm:pt>
-    <dgm:pt modelId="{1EA309E1-79A5-48A2-8603-EB1BB9CFB6E4}" type="pres">
-      <dgm:prSet presAssocID="{074FB2D2-A3F3-4C6A-87EA-212677A761D7}" presName="bgRect" presStyleLbl="bgShp" presStyleIdx="2" presStyleCnt="5"/>
-      <dgm:spPr/>
-    </dgm:pt>
-    <dgm:pt modelId="{790635CA-92B8-4D43-8C44-9AC7F7329CE3}" type="pres">
-      <dgm:prSet presAssocID="{074FB2D2-A3F3-4C6A-87EA-212677A761D7}" presName="iconRect" presStyleLbl="node1" presStyleIdx="2" presStyleCnt="5"/>
-      <dgm:spPr>
-        <a:blipFill>
-          <a:blip xmlns:r="http://schemas.openxmlformats.org/officeDocument/2006/relationships">
-            <a:extLst>
-              <a:ext uri="{28A0092B-C50C-407E-A947-70E740481C1C}">
-                <a14:useLocalDpi xmlns:a14="http://schemas.microsoft.com/office/drawing/2010/main" val="0"/>
-              </a:ext>
-              <a:ext uri="{96DAC541-7B7A-43D3-8B79-37D633B846F1}">
-                <asvg:svgBlip xmlns:asvg="http://schemas.microsoft.com/office/drawing/2016/SVG/main" r:embed="rId3"/>
-              </a:ext>
-            </a:extLst>
-          </a:blip>
-          <a:stretch>
-            <a:fillRect/>
-          </a:stretch>
-        </a:blipFill>
-        <a:ln>
-          <a:noFill/>
-        </a:ln>
-      </dgm:spPr>
-      <dgm:extLst>
-        <a:ext uri="{E40237B7-FDA0-4F09-8148-C483321AD2D9}">
-          <dgm14:cNvPr xmlns:dgm14="http://schemas.microsoft.com/office/drawing/2010/diagram" id="0" name="" descr="Filter"/>
-        </a:ext>
-      </dgm:extLst>
-    </dgm:pt>
-    <dgm:pt modelId="{8D052EF6-463C-4F71-8DA1-1950075410A6}" type="pres">
-      <dgm:prSet presAssocID="{074FB2D2-A3F3-4C6A-87EA-212677A761D7}" presName="spaceRect" presStyleCnt="0"/>
-      <dgm:spPr/>
-    </dgm:pt>
-    <dgm:pt modelId="{FDC4A94C-0301-4FB9-9F8D-D9123515AF05}" type="pres">
-      <dgm:prSet presAssocID="{074FB2D2-A3F3-4C6A-87EA-212677A761D7}" presName="parTx" presStyleLbl="revTx" presStyleIdx="2" presStyleCnt="5">
+    <dgm:pt modelId="{CFFC8878-53E2-45FA-96F9-B5D0F738E669}" type="pres">
+      <dgm:prSet presAssocID="{074FB2D2-A3F3-4C6A-87EA-212677A761D7}" presName="node" presStyleLbl="node1" presStyleIdx="2" presStyleCnt="5">
         <dgm:presLayoutVars>
-          <dgm:chMax val="0"/>
-          <dgm:chPref val="0"/>
+          <dgm:bulletEnabled val="1"/>
         </dgm:presLayoutVars>
       </dgm:prSet>
       <dgm:spPr/>
     </dgm:pt>
-    <dgm:pt modelId="{DA2FC68F-8BBD-4888-B75A-19382A0B373D}" type="pres">
-      <dgm:prSet presAssocID="{5C563797-D161-4BCD-859E-5D74EA9AB580}" presName="sibTrans" presStyleCnt="0"/>
+    <dgm:pt modelId="{3F7FD82D-24C4-4DE3-AAB3-29775AD3E6AE}" type="pres">
+      <dgm:prSet presAssocID="{5C563797-D161-4BCD-859E-5D74EA9AB580}" presName="sibTrans" presStyleLbl="sibTrans1D1" presStyleIdx="2" presStyleCnt="4"/>
       <dgm:spPr/>
     </dgm:pt>
-    <dgm:pt modelId="{7E15136F-8DBA-421A-89D0-1ECFC3FC2C5E}" type="pres">
-      <dgm:prSet presAssocID="{4F8CBB0B-4E08-44F6-AAC1-80AF8EC19F61}" presName="compNode" presStyleCnt="0"/>
+    <dgm:pt modelId="{92A09896-5C94-4407-A07B-C7F8E0C1F948}" type="pres">
+      <dgm:prSet presAssocID="{5C563797-D161-4BCD-859E-5D74EA9AB580}" presName="connectorText" presStyleLbl="sibTrans1D1" presStyleIdx="2" presStyleCnt="4"/>
       <dgm:spPr/>
     </dgm:pt>
-    <dgm:pt modelId="{483E1126-C15D-4999-B28C-44BB75A5A80A}" type="pres">
-      <dgm:prSet presAssocID="{4F8CBB0B-4E08-44F6-AAC1-80AF8EC19F61}" presName="bgRect" presStyleLbl="bgShp" presStyleIdx="3" presStyleCnt="5"/>
-      <dgm:spPr/>
-    </dgm:pt>
-    <dgm:pt modelId="{3B2195C6-028A-423E-960B-4502B5CA64A1}" type="pres">
-      <dgm:prSet presAssocID="{4F8CBB0B-4E08-44F6-AAC1-80AF8EC19F61}" presName="iconRect" presStyleLbl="node1" presStyleIdx="3" presStyleCnt="5"/>
-      <dgm:spPr>
-        <a:blipFill>
-          <a:blip xmlns:r="http://schemas.openxmlformats.org/officeDocument/2006/relationships">
-            <a:extLst>
-              <a:ext uri="{28A0092B-C50C-407E-A947-70E740481C1C}">
-                <a14:useLocalDpi xmlns:a14="http://schemas.microsoft.com/office/drawing/2010/main" val="0"/>
-              </a:ext>
-              <a:ext uri="{96DAC541-7B7A-43D3-8B79-37D633B846F1}">
-                <asvg:svgBlip xmlns:asvg="http://schemas.microsoft.com/office/drawing/2016/SVG/main" r:embed="rId4"/>
-              </a:ext>
-            </a:extLst>
-          </a:blip>
-          <a:stretch>
-            <a:fillRect/>
-          </a:stretch>
-        </a:blipFill>
-        <a:ln>
-          <a:noFill/>
-        </a:ln>
-      </dgm:spPr>
-      <dgm:extLst>
-        <a:ext uri="{E40237B7-FDA0-4F09-8148-C483321AD2D9}">
-          <dgm14:cNvPr xmlns:dgm14="http://schemas.microsoft.com/office/drawing/2010/diagram" id="0" name="" descr="Diploma"/>
-        </a:ext>
-      </dgm:extLst>
-    </dgm:pt>
-    <dgm:pt modelId="{72E28DA8-C1DE-43F5-A78F-4DC237F96C85}" type="pres">
-      <dgm:prSet presAssocID="{4F8CBB0B-4E08-44F6-AAC1-80AF8EC19F61}" presName="spaceRect" presStyleCnt="0"/>
-      <dgm:spPr/>
-    </dgm:pt>
-    <dgm:pt modelId="{DF61D090-0D23-4AAA-9782-1A420A872FF1}" type="pres">
-      <dgm:prSet presAssocID="{4F8CBB0B-4E08-44F6-AAC1-80AF8EC19F61}" presName="parTx" presStyleLbl="revTx" presStyleIdx="3" presStyleCnt="5">
+    <dgm:pt modelId="{E9C2EF27-20E0-4600-82A7-9DDF08AB8A39}" type="pres">
+      <dgm:prSet presAssocID="{4F8CBB0B-4E08-44F6-AAC1-80AF8EC19F61}" presName="node" presStyleLbl="node1" presStyleIdx="3" presStyleCnt="5">
         <dgm:presLayoutVars>
-          <dgm:chMax val="0"/>
-          <dgm:chPref val="0"/>
+          <dgm:bulletEnabled val="1"/>
         </dgm:presLayoutVars>
       </dgm:prSet>
       <dgm:spPr/>
     </dgm:pt>
-    <dgm:pt modelId="{12D7682D-213C-4305-B598-83782D69A690}" type="pres">
-      <dgm:prSet presAssocID="{02B2C7DE-99BE-408F-A798-57726FB78B1D}" presName="sibTrans" presStyleCnt="0"/>
+    <dgm:pt modelId="{D7B0C0DE-D128-4D8C-90FA-2D74305EE8CB}" type="pres">
+      <dgm:prSet presAssocID="{02B2C7DE-99BE-408F-A798-57726FB78B1D}" presName="sibTrans" presStyleLbl="sibTrans1D1" presStyleIdx="3" presStyleCnt="4"/>
       <dgm:spPr/>
     </dgm:pt>
-    <dgm:pt modelId="{D580CC74-683F-4A5E-A2B2-743F3880F079}" type="pres">
-      <dgm:prSet presAssocID="{91FB0A42-67BB-407D-BEE4-0FC1668A0B6A}" presName="compNode" presStyleCnt="0"/>
+    <dgm:pt modelId="{18AD4045-9CBC-4542-85E0-42AB3F3ABAFA}" type="pres">
+      <dgm:prSet presAssocID="{02B2C7DE-99BE-408F-A798-57726FB78B1D}" presName="connectorText" presStyleLbl="sibTrans1D1" presStyleIdx="3" presStyleCnt="4"/>
       <dgm:spPr/>
     </dgm:pt>
-    <dgm:pt modelId="{18069744-4EC7-47B9-8F91-5F78C99F652F}" type="pres">
-      <dgm:prSet presAssocID="{91FB0A42-67BB-407D-BEE4-0FC1668A0B6A}" presName="bgRect" presStyleLbl="bgShp" presStyleIdx="4" presStyleCnt="5"/>
-      <dgm:spPr/>
-    </dgm:pt>
-    <dgm:pt modelId="{FD2C4B67-76A7-4493-9A76-8458253A2B1C}" type="pres">
-      <dgm:prSet presAssocID="{91FB0A42-67BB-407D-BEE4-0FC1668A0B6A}" presName="iconRect" presStyleLbl="node1" presStyleIdx="4" presStyleCnt="5"/>
-      <dgm:spPr>
-        <a:blipFill>
-          <a:blip xmlns:r="http://schemas.openxmlformats.org/officeDocument/2006/relationships">
-            <a:extLst>
-              <a:ext uri="{28A0092B-C50C-407E-A947-70E740481C1C}">
-                <a14:useLocalDpi xmlns:a14="http://schemas.microsoft.com/office/drawing/2010/main" val="0"/>
-              </a:ext>
-              <a:ext uri="{96DAC541-7B7A-43D3-8B79-37D633B846F1}">
-                <asvg:svgBlip xmlns:asvg="http://schemas.microsoft.com/office/drawing/2016/SVG/main" r:embed="rId5"/>
-              </a:ext>
-            </a:extLst>
-          </a:blip>
-          <a:stretch>
-            <a:fillRect/>
-          </a:stretch>
-        </a:blipFill>
-        <a:ln>
-          <a:noFill/>
-        </a:ln>
-      </dgm:spPr>
-      <dgm:extLst>
-        <a:ext uri="{E40237B7-FDA0-4F09-8148-C483321AD2D9}">
-          <dgm14:cNvPr xmlns:dgm14="http://schemas.microsoft.com/office/drawing/2010/diagram" id="0" name="" descr="Database"/>
-        </a:ext>
-      </dgm:extLst>
-    </dgm:pt>
-    <dgm:pt modelId="{7CC2919C-B9EE-487B-8BF0-05A079778FA8}" type="pres">
-      <dgm:prSet presAssocID="{91FB0A42-67BB-407D-BEE4-0FC1668A0B6A}" presName="spaceRect" presStyleCnt="0"/>
-      <dgm:spPr/>
-    </dgm:pt>
-    <dgm:pt modelId="{72E2F59E-2298-4148-A90A-774231C1F927}" type="pres">
-      <dgm:prSet presAssocID="{91FB0A42-67BB-407D-BEE4-0FC1668A0B6A}" presName="parTx" presStyleLbl="revTx" presStyleIdx="4" presStyleCnt="5">
+    <dgm:pt modelId="{716CA9B1-0CF5-484E-980A-13F54B05F17A}" type="pres">
+      <dgm:prSet presAssocID="{91FB0A42-67BB-407D-BEE4-0FC1668A0B6A}" presName="node" presStyleLbl="node1" presStyleIdx="4" presStyleCnt="5">
         <dgm:presLayoutVars>
-          <dgm:chMax val="0"/>
-          <dgm:chPref val="0"/>
+          <dgm:bulletEnabled val="1"/>
         </dgm:presLayoutVars>
       </dgm:prSet>
       <dgm:spPr/>
@@ -6784,51 +6618,43 @@
   </dgm:ptLst>
   <dgm:cxnLst>
     <dgm:cxn modelId="{2B808107-F445-4226-AD23-FA38E9A6E126}" srcId="{CBE1E850-E891-47BC-8D60-1E59EF37442C}" destId="{CBEE00FA-0E1B-4413-BE1D-143273DFF0FD}" srcOrd="0" destOrd="0" parTransId="{55BF5488-B5B2-42FE-88CF-18F76CB50DEE}" sibTransId="{69800547-0F76-4D24-A978-09DC51D885A1}"/>
-    <dgm:cxn modelId="{3F96D361-AD08-4EAE-827F-3D0C0E28FE1C}" type="presOf" srcId="{CBEE00FA-0E1B-4413-BE1D-143273DFF0FD}" destId="{1E1104BA-F754-4D5C-9044-A51181849552}" srcOrd="0" destOrd="0" presId="urn:microsoft.com/office/officeart/2018/2/layout/IconVerticalSolidList"/>
-    <dgm:cxn modelId="{FF6FF243-F3A1-40DA-8A1E-191B866BE2AE}" type="presOf" srcId="{CBE1E850-E891-47BC-8D60-1E59EF37442C}" destId="{F3545DE9-6C72-465F-957B-491E4D6DF75B}" srcOrd="0" destOrd="0" presId="urn:microsoft.com/office/officeart/2018/2/layout/IconVerticalSolidList"/>
+    <dgm:cxn modelId="{499DE611-8A22-4787-8FC8-C16C4578B1D4}" type="presOf" srcId="{02B2C7DE-99BE-408F-A798-57726FB78B1D}" destId="{D7B0C0DE-D128-4D8C-90FA-2D74305EE8CB}" srcOrd="0" destOrd="0" presId="urn:microsoft.com/office/officeart/2016/7/layout/RepeatingBendingProcessNew"/>
+    <dgm:cxn modelId="{1E16C516-9431-4118-AC3C-B6B3D0CDA8C1}" type="presOf" srcId="{4F8CBB0B-4E08-44F6-AAC1-80AF8EC19F61}" destId="{E9C2EF27-20E0-4600-82A7-9DDF08AB8A39}" srcOrd="0" destOrd="0" presId="urn:microsoft.com/office/officeart/2016/7/layout/RepeatingBendingProcessNew"/>
+    <dgm:cxn modelId="{82CA7D22-A213-45C5-A959-C62457381A79}" type="presOf" srcId="{5C563797-D161-4BCD-859E-5D74EA9AB580}" destId="{92A09896-5C94-4407-A07B-C7F8E0C1F948}" srcOrd="1" destOrd="0" presId="urn:microsoft.com/office/officeart/2016/7/layout/RepeatingBendingProcessNew"/>
+    <dgm:cxn modelId="{4E222132-2EB2-4EFF-AB06-83395BFAF508}" type="presOf" srcId="{3DB9BA6E-D348-4530-B79D-B5936B8B8AF6}" destId="{2B387C8C-7DC2-4063-9877-E39C8530DEA9}" srcOrd="1" destOrd="0" presId="urn:microsoft.com/office/officeart/2016/7/layout/RepeatingBendingProcessNew"/>
+    <dgm:cxn modelId="{8AD3AD34-19A8-412B-B80F-70A34A2D287D}" type="presOf" srcId="{69800547-0F76-4D24-A978-09DC51D885A1}" destId="{4FD897F3-C0D1-4D06-BB8E-6F23DF97D5B4}" srcOrd="0" destOrd="0" presId="urn:microsoft.com/office/officeart/2016/7/layout/RepeatingBendingProcessNew"/>
+    <dgm:cxn modelId="{A15B4142-349D-451E-BF61-C74A5E5AD715}" type="presOf" srcId="{5C563797-D161-4BCD-859E-5D74EA9AB580}" destId="{3F7FD82D-24C4-4DE3-AAB3-29775AD3E6AE}" srcOrd="0" destOrd="0" presId="urn:microsoft.com/office/officeart/2016/7/layout/RepeatingBendingProcessNew"/>
     <dgm:cxn modelId="{8DB5C26C-6585-4C56-ADB5-554680B2D664}" srcId="{CBE1E850-E891-47BC-8D60-1E59EF37442C}" destId="{91FB0A42-67BB-407D-BEE4-0FC1668A0B6A}" srcOrd="4" destOrd="0" parTransId="{E33416BF-4606-46E0-9D00-9724DC95FD87}" sibTransId="{68082011-8BD2-495F-A681-E87081B310C0}"/>
     <dgm:cxn modelId="{3E8D4256-D925-4CFB-9758-1A012C395262}" srcId="{CBE1E850-E891-47BC-8D60-1E59EF37442C}" destId="{BEA3EC9E-6FBB-48EC-ACEA-939DF9AB046A}" srcOrd="1" destOrd="0" parTransId="{65138A11-6FED-4AD9-B8C0-89FA99D48FA4}" sibTransId="{3DB9BA6E-D348-4530-B79D-B5936B8B8AF6}"/>
     <dgm:cxn modelId="{A0961787-6E2E-4084-8D30-B90D1855A31F}" srcId="{CBE1E850-E891-47BC-8D60-1E59EF37442C}" destId="{4F8CBB0B-4E08-44F6-AAC1-80AF8EC19F61}" srcOrd="3" destOrd="0" parTransId="{20BE97FC-C203-4757-8B5A-2725730F1777}" sibTransId="{02B2C7DE-99BE-408F-A798-57726FB78B1D}"/>
+    <dgm:cxn modelId="{4FC82C8A-052C-464C-9CE2-28A2EF87AFBD}" type="presOf" srcId="{074FB2D2-A3F3-4C6A-87EA-212677A761D7}" destId="{CFFC8878-53E2-45FA-96F9-B5D0F738E669}" srcOrd="0" destOrd="0" presId="urn:microsoft.com/office/officeart/2016/7/layout/RepeatingBendingProcessNew"/>
+    <dgm:cxn modelId="{293B3791-5301-4288-ADCC-D3CAF206D8A9}" type="presOf" srcId="{CBE1E850-E891-47BC-8D60-1E59EF37442C}" destId="{A1AC4010-720A-4D7E-B89F-EAD839E1F064}" srcOrd="0" destOrd="0" presId="urn:microsoft.com/office/officeart/2016/7/layout/RepeatingBendingProcessNew"/>
     <dgm:cxn modelId="{D8478993-B70E-48E1-A2E8-BEFA040AD550}" srcId="{CBE1E850-E891-47BC-8D60-1E59EF37442C}" destId="{074FB2D2-A3F3-4C6A-87EA-212677A761D7}" srcOrd="2" destOrd="0" parTransId="{68B58B92-C26A-43A0-A20C-359B376F747A}" sibTransId="{5C563797-D161-4BCD-859E-5D74EA9AB580}"/>
-    <dgm:cxn modelId="{D6267FAC-D891-4CE1-9C06-8DE333965CB4}" type="presOf" srcId="{91FB0A42-67BB-407D-BEE4-0FC1668A0B6A}" destId="{72E2F59E-2298-4148-A90A-774231C1F927}" srcOrd="0" destOrd="0" presId="urn:microsoft.com/office/officeart/2018/2/layout/IconVerticalSolidList"/>
-    <dgm:cxn modelId="{1E15AEBA-81C5-4F44-92DD-5B6C279A9822}" type="presOf" srcId="{BEA3EC9E-6FBB-48EC-ACEA-939DF9AB046A}" destId="{FD55D884-7680-49DF-A13F-8045DC9CA1C3}" srcOrd="0" destOrd="0" presId="urn:microsoft.com/office/officeart/2018/2/layout/IconVerticalSolidList"/>
-    <dgm:cxn modelId="{74F5CFDE-20CC-4D37-A6E6-83407AE5FD61}" type="presOf" srcId="{4F8CBB0B-4E08-44F6-AAC1-80AF8EC19F61}" destId="{DF61D090-0D23-4AAA-9782-1A420A872FF1}" srcOrd="0" destOrd="0" presId="urn:microsoft.com/office/officeart/2018/2/layout/IconVerticalSolidList"/>
-    <dgm:cxn modelId="{638AF8F8-B38A-4D29-9A53-BE46DC75444E}" type="presOf" srcId="{074FB2D2-A3F3-4C6A-87EA-212677A761D7}" destId="{FDC4A94C-0301-4FB9-9F8D-D9123515AF05}" srcOrd="0" destOrd="0" presId="urn:microsoft.com/office/officeart/2018/2/layout/IconVerticalSolidList"/>
-    <dgm:cxn modelId="{55DB815A-C8E9-4763-AB11-4ECF3460C9EE}" type="presParOf" srcId="{F3545DE9-6C72-465F-957B-491E4D6DF75B}" destId="{346AA22F-73CA-4769-8A47-7B097D23781A}" srcOrd="0" destOrd="0" presId="urn:microsoft.com/office/officeart/2018/2/layout/IconVerticalSolidList"/>
-    <dgm:cxn modelId="{41A56060-FD5B-4C28-A9C3-85B34C10BC4A}" type="presParOf" srcId="{346AA22F-73CA-4769-8A47-7B097D23781A}" destId="{AE19D319-96C3-4A19-A101-FFB7C34D8DEC}" srcOrd="0" destOrd="0" presId="urn:microsoft.com/office/officeart/2018/2/layout/IconVerticalSolidList"/>
-    <dgm:cxn modelId="{EEA0581B-A8A5-4157-BF77-074D95E18481}" type="presParOf" srcId="{346AA22F-73CA-4769-8A47-7B097D23781A}" destId="{8E9465D8-37A0-455A-955B-D662A8DA272E}" srcOrd="1" destOrd="0" presId="urn:microsoft.com/office/officeart/2018/2/layout/IconVerticalSolidList"/>
-    <dgm:cxn modelId="{8B0BFE48-A3A3-487C-A33D-EF24DDC470BE}" type="presParOf" srcId="{346AA22F-73CA-4769-8A47-7B097D23781A}" destId="{F4149086-2C9B-4A7A-864F-2047C4120EB1}" srcOrd="2" destOrd="0" presId="urn:microsoft.com/office/officeart/2018/2/layout/IconVerticalSolidList"/>
-    <dgm:cxn modelId="{1B2E969D-43B6-40B9-A367-4465E1061251}" type="presParOf" srcId="{346AA22F-73CA-4769-8A47-7B097D23781A}" destId="{1E1104BA-F754-4D5C-9044-A51181849552}" srcOrd="3" destOrd="0" presId="urn:microsoft.com/office/officeart/2018/2/layout/IconVerticalSolidList"/>
-    <dgm:cxn modelId="{8344D111-B36A-4D27-AA80-B06A06ED1E29}" type="presParOf" srcId="{F3545DE9-6C72-465F-957B-491E4D6DF75B}" destId="{4262C22B-DA63-448F-A16C-87EE3C92D4A0}" srcOrd="1" destOrd="0" presId="urn:microsoft.com/office/officeart/2018/2/layout/IconVerticalSolidList"/>
-    <dgm:cxn modelId="{13D34A8C-F3ED-4AC7-A923-DECEAC099F3A}" type="presParOf" srcId="{F3545DE9-6C72-465F-957B-491E4D6DF75B}" destId="{E7DBA843-481B-4367-9DF8-DCE86998C96F}" srcOrd="2" destOrd="0" presId="urn:microsoft.com/office/officeart/2018/2/layout/IconVerticalSolidList"/>
-    <dgm:cxn modelId="{5807710A-C23D-4D21-A263-BB2EFBDA496C}" type="presParOf" srcId="{E7DBA843-481B-4367-9DF8-DCE86998C96F}" destId="{5A79B7A7-F09F-4928-BC2F-03E2E132C5FA}" srcOrd="0" destOrd="0" presId="urn:microsoft.com/office/officeart/2018/2/layout/IconVerticalSolidList"/>
-    <dgm:cxn modelId="{FFFEBD29-DB09-49D2-80D6-483C6EB03FAA}" type="presParOf" srcId="{E7DBA843-481B-4367-9DF8-DCE86998C96F}" destId="{E4A571BB-2629-4794-B99D-2445677D8064}" srcOrd="1" destOrd="0" presId="urn:microsoft.com/office/officeart/2018/2/layout/IconVerticalSolidList"/>
-    <dgm:cxn modelId="{345DD07C-9A38-4925-9169-CDDB42072A04}" type="presParOf" srcId="{E7DBA843-481B-4367-9DF8-DCE86998C96F}" destId="{5671766D-0AD5-4304-A1B4-AD28DF1E04AB}" srcOrd="2" destOrd="0" presId="urn:microsoft.com/office/officeart/2018/2/layout/IconVerticalSolidList"/>
-    <dgm:cxn modelId="{96B12D5C-E976-4819-971C-D5F08514507C}" type="presParOf" srcId="{E7DBA843-481B-4367-9DF8-DCE86998C96F}" destId="{FD55D884-7680-49DF-A13F-8045DC9CA1C3}" srcOrd="3" destOrd="0" presId="urn:microsoft.com/office/officeart/2018/2/layout/IconVerticalSolidList"/>
-    <dgm:cxn modelId="{9A3A52DE-60F5-41C4-A490-BE394B0BBE62}" type="presParOf" srcId="{F3545DE9-6C72-465F-957B-491E4D6DF75B}" destId="{976A327A-EDCF-491E-B071-B03F7F31CE2E}" srcOrd="3" destOrd="0" presId="urn:microsoft.com/office/officeart/2018/2/layout/IconVerticalSolidList"/>
-    <dgm:cxn modelId="{534CCB3A-60A4-43AE-BD8C-D2BABCBF8BCD}" type="presParOf" srcId="{F3545DE9-6C72-465F-957B-491E4D6DF75B}" destId="{46AC3FDB-FCDA-4251-93F2-CAAC53B1C0EE}" srcOrd="4" destOrd="0" presId="urn:microsoft.com/office/officeart/2018/2/layout/IconVerticalSolidList"/>
-    <dgm:cxn modelId="{D74B0890-5BB9-4C06-BF15-0567261D3E26}" type="presParOf" srcId="{46AC3FDB-FCDA-4251-93F2-CAAC53B1C0EE}" destId="{1EA309E1-79A5-48A2-8603-EB1BB9CFB6E4}" srcOrd="0" destOrd="0" presId="urn:microsoft.com/office/officeart/2018/2/layout/IconVerticalSolidList"/>
-    <dgm:cxn modelId="{7234CF29-BAB2-4631-B3E7-D23E80B1DCF4}" type="presParOf" srcId="{46AC3FDB-FCDA-4251-93F2-CAAC53B1C0EE}" destId="{790635CA-92B8-4D43-8C44-9AC7F7329CE3}" srcOrd="1" destOrd="0" presId="urn:microsoft.com/office/officeart/2018/2/layout/IconVerticalSolidList"/>
-    <dgm:cxn modelId="{F7A7D6EA-A848-4E7B-970D-5A91E053D919}" type="presParOf" srcId="{46AC3FDB-FCDA-4251-93F2-CAAC53B1C0EE}" destId="{8D052EF6-463C-4F71-8DA1-1950075410A6}" srcOrd="2" destOrd="0" presId="urn:microsoft.com/office/officeart/2018/2/layout/IconVerticalSolidList"/>
-    <dgm:cxn modelId="{ACBA7A8C-5166-449A-B1C2-A5B70B1C0B46}" type="presParOf" srcId="{46AC3FDB-FCDA-4251-93F2-CAAC53B1C0EE}" destId="{FDC4A94C-0301-4FB9-9F8D-D9123515AF05}" srcOrd="3" destOrd="0" presId="urn:microsoft.com/office/officeart/2018/2/layout/IconVerticalSolidList"/>
-    <dgm:cxn modelId="{4B44897C-B40B-480A-9841-C2812482566A}" type="presParOf" srcId="{F3545DE9-6C72-465F-957B-491E4D6DF75B}" destId="{DA2FC68F-8BBD-4888-B75A-19382A0B373D}" srcOrd="5" destOrd="0" presId="urn:microsoft.com/office/officeart/2018/2/layout/IconVerticalSolidList"/>
-    <dgm:cxn modelId="{040702C1-306C-4A4B-A447-B55E489B5D8E}" type="presParOf" srcId="{F3545DE9-6C72-465F-957B-491E4D6DF75B}" destId="{7E15136F-8DBA-421A-89D0-1ECFC3FC2C5E}" srcOrd="6" destOrd="0" presId="urn:microsoft.com/office/officeart/2018/2/layout/IconVerticalSolidList"/>
-    <dgm:cxn modelId="{ED63B434-1A6F-4BD1-B02A-A778344CC684}" type="presParOf" srcId="{7E15136F-8DBA-421A-89D0-1ECFC3FC2C5E}" destId="{483E1126-C15D-4999-B28C-44BB75A5A80A}" srcOrd="0" destOrd="0" presId="urn:microsoft.com/office/officeart/2018/2/layout/IconVerticalSolidList"/>
-    <dgm:cxn modelId="{EE579D0C-39CD-463B-8CEF-FAD5F9B51269}" type="presParOf" srcId="{7E15136F-8DBA-421A-89D0-1ECFC3FC2C5E}" destId="{3B2195C6-028A-423E-960B-4502B5CA64A1}" srcOrd="1" destOrd="0" presId="urn:microsoft.com/office/officeart/2018/2/layout/IconVerticalSolidList"/>
-    <dgm:cxn modelId="{BC7011FC-6468-4792-A6C2-F309832E7AE2}" type="presParOf" srcId="{7E15136F-8DBA-421A-89D0-1ECFC3FC2C5E}" destId="{72E28DA8-C1DE-43F5-A78F-4DC237F96C85}" srcOrd="2" destOrd="0" presId="urn:microsoft.com/office/officeart/2018/2/layout/IconVerticalSolidList"/>
-    <dgm:cxn modelId="{002C538B-5FC8-4B0A-9784-EE2ADC6D91CE}" type="presParOf" srcId="{7E15136F-8DBA-421A-89D0-1ECFC3FC2C5E}" destId="{DF61D090-0D23-4AAA-9782-1A420A872FF1}" srcOrd="3" destOrd="0" presId="urn:microsoft.com/office/officeart/2018/2/layout/IconVerticalSolidList"/>
-    <dgm:cxn modelId="{3E9C87CB-8CEC-45A1-A70E-EA12FB1651CC}" type="presParOf" srcId="{F3545DE9-6C72-465F-957B-491E4D6DF75B}" destId="{12D7682D-213C-4305-B598-83782D69A690}" srcOrd="7" destOrd="0" presId="urn:microsoft.com/office/officeart/2018/2/layout/IconVerticalSolidList"/>
-    <dgm:cxn modelId="{9C425C30-DD6E-4C9A-BB27-BEA940F78466}" type="presParOf" srcId="{F3545DE9-6C72-465F-957B-491E4D6DF75B}" destId="{D580CC74-683F-4A5E-A2B2-743F3880F079}" srcOrd="8" destOrd="0" presId="urn:microsoft.com/office/officeart/2018/2/layout/IconVerticalSolidList"/>
-    <dgm:cxn modelId="{3B8D5B53-93ED-482D-AD20-49F707AB10F3}" type="presParOf" srcId="{D580CC74-683F-4A5E-A2B2-743F3880F079}" destId="{18069744-4EC7-47B9-8F91-5F78C99F652F}" srcOrd="0" destOrd="0" presId="urn:microsoft.com/office/officeart/2018/2/layout/IconVerticalSolidList"/>
-    <dgm:cxn modelId="{D93A9863-BDA0-4413-B619-86B9E4D59256}" type="presParOf" srcId="{D580CC74-683F-4A5E-A2B2-743F3880F079}" destId="{FD2C4B67-76A7-4493-9A76-8458253A2B1C}" srcOrd="1" destOrd="0" presId="urn:microsoft.com/office/officeart/2018/2/layout/IconVerticalSolidList"/>
-    <dgm:cxn modelId="{46C97ECC-6C51-43B4-9E88-2A9F2FC65224}" type="presParOf" srcId="{D580CC74-683F-4A5E-A2B2-743F3880F079}" destId="{7CC2919C-B9EE-487B-8BF0-05A079778FA8}" srcOrd="2" destOrd="0" presId="urn:microsoft.com/office/officeart/2018/2/layout/IconVerticalSolidList"/>
-    <dgm:cxn modelId="{3CD34E18-4734-4B1A-9D85-013D030C97C9}" type="presParOf" srcId="{D580CC74-683F-4A5E-A2B2-743F3880F079}" destId="{72E2F59E-2298-4148-A90A-774231C1F927}" srcOrd="3" destOrd="0" presId="urn:microsoft.com/office/officeart/2018/2/layout/IconVerticalSolidList"/>
+    <dgm:cxn modelId="{0F775EC5-0DE6-44F0-9A49-C730C6F0ED46}" type="presOf" srcId="{3DB9BA6E-D348-4530-B79D-B5936B8B8AF6}" destId="{1D22B376-BEB5-423D-8093-9725192FE0A2}" srcOrd="0" destOrd="0" presId="urn:microsoft.com/office/officeart/2016/7/layout/RepeatingBendingProcessNew"/>
+    <dgm:cxn modelId="{F04A54DE-03A3-41F7-BBC7-B76DF94959CC}" type="presOf" srcId="{CBEE00FA-0E1B-4413-BE1D-143273DFF0FD}" destId="{0F85D474-B93C-418B-A4A4-CE483A41C0A2}" srcOrd="0" destOrd="0" presId="urn:microsoft.com/office/officeart/2016/7/layout/RepeatingBendingProcessNew"/>
+    <dgm:cxn modelId="{48F2E3E0-CAA0-43CA-BF20-FF9E5BB91980}" type="presOf" srcId="{BEA3EC9E-6FBB-48EC-ACEA-939DF9AB046A}" destId="{8A589B51-1154-4174-8272-2DA394768254}" srcOrd="0" destOrd="0" presId="urn:microsoft.com/office/officeart/2016/7/layout/RepeatingBendingProcessNew"/>
+    <dgm:cxn modelId="{FFF6ACEE-2929-4845-8A5D-C4BEF9773F4A}" type="presOf" srcId="{69800547-0F76-4D24-A978-09DC51D885A1}" destId="{B7E5BD02-6794-4E23-B4F1-56FA7F62A23D}" srcOrd="1" destOrd="0" presId="urn:microsoft.com/office/officeart/2016/7/layout/RepeatingBendingProcessNew"/>
+    <dgm:cxn modelId="{C5AEFEFA-C775-4A2A-A729-CE9B6F0229EE}" type="presOf" srcId="{02B2C7DE-99BE-408F-A798-57726FB78B1D}" destId="{18AD4045-9CBC-4542-85E0-42AB3F3ABAFA}" srcOrd="1" destOrd="0" presId="urn:microsoft.com/office/officeart/2016/7/layout/RepeatingBendingProcessNew"/>
+    <dgm:cxn modelId="{19B59BFD-3959-470B-8B71-9B032D839822}" type="presOf" srcId="{91FB0A42-67BB-407D-BEE4-0FC1668A0B6A}" destId="{716CA9B1-0CF5-484E-980A-13F54B05F17A}" srcOrd="0" destOrd="0" presId="urn:microsoft.com/office/officeart/2016/7/layout/RepeatingBendingProcessNew"/>
+    <dgm:cxn modelId="{AFCA3C01-9B63-4265-A67E-9A7B537F9A95}" type="presParOf" srcId="{A1AC4010-720A-4D7E-B89F-EAD839E1F064}" destId="{0F85D474-B93C-418B-A4A4-CE483A41C0A2}" srcOrd="0" destOrd="0" presId="urn:microsoft.com/office/officeart/2016/7/layout/RepeatingBendingProcessNew"/>
+    <dgm:cxn modelId="{6E5788ED-2904-4042-A444-49D8D543E5BA}" type="presParOf" srcId="{A1AC4010-720A-4D7E-B89F-EAD839E1F064}" destId="{4FD897F3-C0D1-4D06-BB8E-6F23DF97D5B4}" srcOrd="1" destOrd="0" presId="urn:microsoft.com/office/officeart/2016/7/layout/RepeatingBendingProcessNew"/>
+    <dgm:cxn modelId="{AA1D96C7-62A6-41B0-825A-3BB2B1D43E1C}" type="presParOf" srcId="{4FD897F3-C0D1-4D06-BB8E-6F23DF97D5B4}" destId="{B7E5BD02-6794-4E23-B4F1-56FA7F62A23D}" srcOrd="0" destOrd="0" presId="urn:microsoft.com/office/officeart/2016/7/layout/RepeatingBendingProcessNew"/>
+    <dgm:cxn modelId="{B4DEF537-FB64-4E37-A018-53451A2D78CE}" type="presParOf" srcId="{A1AC4010-720A-4D7E-B89F-EAD839E1F064}" destId="{8A589B51-1154-4174-8272-2DA394768254}" srcOrd="2" destOrd="0" presId="urn:microsoft.com/office/officeart/2016/7/layout/RepeatingBendingProcessNew"/>
+    <dgm:cxn modelId="{95340B0A-20F0-4AA2-96BB-B0ECC7267C22}" type="presParOf" srcId="{A1AC4010-720A-4D7E-B89F-EAD839E1F064}" destId="{1D22B376-BEB5-423D-8093-9725192FE0A2}" srcOrd="3" destOrd="0" presId="urn:microsoft.com/office/officeart/2016/7/layout/RepeatingBendingProcessNew"/>
+    <dgm:cxn modelId="{B88C72C7-A726-4401-9315-E2249458D23E}" type="presParOf" srcId="{1D22B376-BEB5-423D-8093-9725192FE0A2}" destId="{2B387C8C-7DC2-4063-9877-E39C8530DEA9}" srcOrd="0" destOrd="0" presId="urn:microsoft.com/office/officeart/2016/7/layout/RepeatingBendingProcessNew"/>
+    <dgm:cxn modelId="{35532AEE-5CFD-4B12-90FC-1F266FD0F534}" type="presParOf" srcId="{A1AC4010-720A-4D7E-B89F-EAD839E1F064}" destId="{CFFC8878-53E2-45FA-96F9-B5D0F738E669}" srcOrd="4" destOrd="0" presId="urn:microsoft.com/office/officeart/2016/7/layout/RepeatingBendingProcessNew"/>
+    <dgm:cxn modelId="{8267C658-5A83-4986-8782-6AD5E37ED49E}" type="presParOf" srcId="{A1AC4010-720A-4D7E-B89F-EAD839E1F064}" destId="{3F7FD82D-24C4-4DE3-AAB3-29775AD3E6AE}" srcOrd="5" destOrd="0" presId="urn:microsoft.com/office/officeart/2016/7/layout/RepeatingBendingProcessNew"/>
+    <dgm:cxn modelId="{4C92675F-1BA2-412A-80CC-9EEF0C0267C3}" type="presParOf" srcId="{3F7FD82D-24C4-4DE3-AAB3-29775AD3E6AE}" destId="{92A09896-5C94-4407-A07B-C7F8E0C1F948}" srcOrd="0" destOrd="0" presId="urn:microsoft.com/office/officeart/2016/7/layout/RepeatingBendingProcessNew"/>
+    <dgm:cxn modelId="{2F818DAC-9FDA-4486-BC7C-C0E05E54C556}" type="presParOf" srcId="{A1AC4010-720A-4D7E-B89F-EAD839E1F064}" destId="{E9C2EF27-20E0-4600-82A7-9DDF08AB8A39}" srcOrd="6" destOrd="0" presId="urn:microsoft.com/office/officeart/2016/7/layout/RepeatingBendingProcessNew"/>
+    <dgm:cxn modelId="{477B1DA9-263D-4DA4-8DFC-DF8DCC988516}" type="presParOf" srcId="{A1AC4010-720A-4D7E-B89F-EAD839E1F064}" destId="{D7B0C0DE-D128-4D8C-90FA-2D74305EE8CB}" srcOrd="7" destOrd="0" presId="urn:microsoft.com/office/officeart/2016/7/layout/RepeatingBendingProcessNew"/>
+    <dgm:cxn modelId="{E5DF7A72-9E98-4827-8E36-2DFD06F4671C}" type="presParOf" srcId="{D7B0C0DE-D128-4D8C-90FA-2D74305EE8CB}" destId="{18AD4045-9CBC-4542-85E0-42AB3F3ABAFA}" srcOrd="0" destOrd="0" presId="urn:microsoft.com/office/officeart/2016/7/layout/RepeatingBendingProcessNew"/>
+    <dgm:cxn modelId="{E693ED79-C1A2-45E8-ACE5-5C933FB8FDD0}" type="presParOf" srcId="{A1AC4010-720A-4D7E-B89F-EAD839E1F064}" destId="{716CA9B1-0CF5-484E-980A-13F54B05F17A}" srcOrd="8" destOrd="0" presId="urn:microsoft.com/office/officeart/2016/7/layout/RepeatingBendingProcessNew"/>
   </dgm:cxnLst>
   <dgm:bg/>
   <dgm:whole/>
   <dgm:extLst>
     <a:ext uri="http://schemas.microsoft.com/office/drawing/2008/diagram">
-      <dsp:dataModelExt xmlns:dsp="http://schemas.microsoft.com/office/drawing/2008/diagram" relId="rId6" minVer="http://schemas.openxmlformats.org/drawingml/2006/diagram"/>
+      <dsp:dataModelExt xmlns:dsp="http://schemas.microsoft.com/office/drawing/2008/diagram" relId="rId7" minVer="http://schemas.openxmlformats.org/drawingml/2006/diagram"/>
     </a:ext>
   </dgm:extLst>
 </dgm:dataModel>
@@ -9064,7 +8890,7 @@
             <a:buNone/>
           </a:pPr>
           <a:r>
-            <a:rPr lang="en-US" sz="1300" kern="1200"/>
+            <a:rPr lang="en-US" sz="1300" kern="1200" dirty="0"/>
             <a:t>The Problem: Hosting large-scale inter-collegiate fests involves massive logistical hurdles—long queues, paper tracking, manual verification, and delayed certificates.</a:t>
           </a:r>
         </a:p>
@@ -9220,7 +9046,7 @@
             <a:buNone/>
           </a:pPr>
           <a:r>
-            <a:rPr lang="en-US" sz="1300" kern="1200"/>
+            <a:rPr lang="en-US" sz="1300" kern="1200" dirty="0"/>
             <a:t>The Solution: We developed SHRESHTA to completely digitalize and streamline workflows autonomously.</a:t>
           </a:r>
         </a:p>
@@ -9866,20 +9692,98 @@
       <dsp:cNvGrpSpPr/>
     </dsp:nvGrpSpPr>
     <dsp:grpSpPr/>
-    <dsp:sp modelId="{AE19D319-96C3-4A19-A101-FFB7C34D8DEC}">
+    <dsp:sp modelId="{4FD897F3-C0D1-4D06-BB8E-6F23DF97D5B4}">
       <dsp:nvSpPr>
         <dsp:cNvPr id="0" name=""/>
         <dsp:cNvSpPr/>
       </dsp:nvSpPr>
       <dsp:spPr>
         <a:xfrm>
-          <a:off x="0" y="3404"/>
-          <a:ext cx="7886700" cy="725119"/>
+          <a:off x="2280144" y="1185451"/>
+          <a:ext cx="492856" cy="91440"/>
         </a:xfrm>
-        <a:prstGeom prst="roundRect">
-          <a:avLst>
-            <a:gd name="adj" fmla="val 10000"/>
-          </a:avLst>
+        <a:custGeom>
+          <a:avLst/>
+          <a:gdLst/>
+          <a:ahLst/>
+          <a:cxnLst/>
+          <a:rect l="0" t="0" r="0" b="0"/>
+          <a:pathLst>
+            <a:path>
+              <a:moveTo>
+                <a:pt x="0" y="45720"/>
+              </a:moveTo>
+              <a:lnTo>
+                <a:pt x="492856" y="45720"/>
+              </a:lnTo>
+            </a:path>
+          </a:pathLst>
+        </a:custGeom>
+        <a:noFill/>
+        <a:ln w="9525" cap="flat" cmpd="sng" algn="ctr">
+          <a:solidFill>
+            <a:schemeClr val="accent2">
+              <a:hueOff val="0"/>
+              <a:satOff val="0"/>
+              <a:lumOff val="0"/>
+              <a:alphaOff val="0"/>
+            </a:schemeClr>
+          </a:solidFill>
+          <a:prstDash val="solid"/>
+          <a:tailEnd type="arrow"/>
+        </a:ln>
+        <a:effectLst/>
+      </dsp:spPr>
+      <dsp:style>
+        <a:lnRef idx="1">
+          <a:scrgbClr r="0" g="0" b="0"/>
+        </a:lnRef>
+        <a:fillRef idx="0">
+          <a:scrgbClr r="0" g="0" b="0"/>
+        </a:fillRef>
+        <a:effectRef idx="0">
+          <a:scrgbClr r="0" g="0" b="0"/>
+        </a:effectRef>
+        <a:fontRef idx="minor"/>
+      </dsp:style>
+      <dsp:txBody>
+        <a:bodyPr spcFirstLastPara="0" vert="horz" wrap="square" lIns="12700" tIns="0" rIns="12700" bIns="0" numCol="1" spcCol="1270" anchor="ctr" anchorCtr="0">
+          <a:noAutofit/>
+        </a:bodyPr>
+        <a:lstStyle/>
+        <a:p>
+          <a:pPr marL="0" lvl="0" indent="0" algn="ctr" defTabSz="222250">
+            <a:lnSpc>
+              <a:spcPct val="90000"/>
+            </a:lnSpc>
+            <a:spcBef>
+              <a:spcPct val="0"/>
+            </a:spcBef>
+            <a:spcAft>
+              <a:spcPct val="35000"/>
+            </a:spcAft>
+            <a:buNone/>
+          </a:pPr>
+          <a:endParaRPr lang="en-US" sz="500" kern="1200"/>
+        </a:p>
+      </dsp:txBody>
+      <dsp:txXfrm>
+        <a:off x="2513486" y="1228553"/>
+        <a:ext cx="26172" cy="5234"/>
+      </dsp:txXfrm>
+    </dsp:sp>
+    <dsp:sp modelId="{0F85D474-B93C-418B-A4A4-CE483A41C0A2}">
+      <dsp:nvSpPr>
+        <dsp:cNvPr id="0" name=""/>
+        <dsp:cNvSpPr/>
+      </dsp:nvSpPr>
+      <dsp:spPr>
+        <a:xfrm>
+          <a:off x="6045" y="548401"/>
+          <a:ext cx="2275898" cy="1365538"/>
+        </a:xfrm>
+        <a:prstGeom prst="rect">
+          <a:avLst/>
         </a:prstGeom>
         <a:solidFill>
           <a:schemeClr val="accent2">
@@ -9889,54 +9793,15 @@
             <a:alphaOff val="0"/>
           </a:schemeClr>
         </a:solidFill>
-        <a:ln>
-          <a:noFill/>
-        </a:ln>
-        <a:effectLst/>
-      </dsp:spPr>
-      <dsp:style>
-        <a:lnRef idx="0">
-          <a:scrgbClr r="0" g="0" b="0"/>
-        </a:lnRef>
-        <a:fillRef idx="1">
-          <a:scrgbClr r="0" g="0" b="0"/>
-        </a:fillRef>
-        <a:effectRef idx="0">
-          <a:scrgbClr r="0" g="0" b="0"/>
-        </a:effectRef>
-        <a:fontRef idx="minor"/>
-      </dsp:style>
-    </dsp:sp>
-    <dsp:sp modelId="{8E9465D8-37A0-455A-955B-D662A8DA272E}">
-      <dsp:nvSpPr>
-        <dsp:cNvPr id="0" name=""/>
-        <dsp:cNvSpPr/>
-      </dsp:nvSpPr>
-      <dsp:spPr>
-        <a:xfrm>
-          <a:off x="219348" y="166556"/>
-          <a:ext cx="398815" cy="398815"/>
-        </a:xfrm>
-        <a:prstGeom prst="rect">
-          <a:avLst/>
-        </a:prstGeom>
-        <a:blipFill>
-          <a:blip xmlns:r="http://schemas.openxmlformats.org/officeDocument/2006/relationships">
-            <a:extLst>
-              <a:ext uri="{28A0092B-C50C-407E-A947-70E740481C1C}">
-                <a14:useLocalDpi xmlns:a14="http://schemas.microsoft.com/office/drawing/2010/main" val="0"/>
-              </a:ext>
-              <a:ext uri="{96DAC541-7B7A-43D3-8B79-37D633B846F1}">
-                <asvg:svgBlip xmlns:asvg="http://schemas.microsoft.com/office/drawing/2016/SVG/main" r:embed="rId1"/>
-              </a:ext>
-            </a:extLst>
-          </a:blip>
-          <a:stretch>
-            <a:fillRect/>
-          </a:stretch>
-        </a:blipFill>
         <a:ln w="25400" cap="flat" cmpd="sng" algn="ctr">
-          <a:noFill/>
+          <a:solidFill>
+            <a:schemeClr val="lt1">
+              <a:hueOff val="0"/>
+              <a:satOff val="0"/>
+              <a:lumOff val="0"/>
+              <a:alphaOff val="0"/>
+            </a:schemeClr>
+          </a:solidFill>
           <a:prstDash val="solid"/>
         </a:ln>
         <a:effectLst/>
@@ -9955,28 +9820,79 @@
           <a:schemeClr val="lt1"/>
         </a:fontRef>
       </dsp:style>
+      <dsp:txBody>
+        <a:bodyPr spcFirstLastPara="0" vert="horz" wrap="square" lIns="111521" tIns="117061" rIns="111521" bIns="117061" numCol="1" spcCol="1270" anchor="ctr" anchorCtr="0">
+          <a:noAutofit/>
+        </a:bodyPr>
+        <a:lstStyle/>
+        <a:p>
+          <a:pPr marL="0" lvl="0" indent="0" algn="ctr" defTabSz="711200">
+            <a:lnSpc>
+              <a:spcPct val="100000"/>
+            </a:lnSpc>
+            <a:spcBef>
+              <a:spcPct val="0"/>
+            </a:spcBef>
+            <a:spcAft>
+              <a:spcPct val="35000"/>
+            </a:spcAft>
+            <a:buNone/>
+          </a:pPr>
+          <a:r>
+            <a:rPr lang="en-US" sz="1600" kern="1200"/>
+            <a:t>1. Eliminate Paper Trails: Store 100% of registrations on secured cloud.</a:t>
+          </a:r>
+        </a:p>
+      </dsp:txBody>
+      <dsp:txXfrm>
+        <a:off x="6045" y="548401"/>
+        <a:ext cx="2275898" cy="1365538"/>
+      </dsp:txXfrm>
     </dsp:sp>
-    <dsp:sp modelId="{1E1104BA-F754-4D5C-9044-A51181849552}">
+    <dsp:sp modelId="{1D22B376-BEB5-423D-8093-9725192FE0A2}">
       <dsp:nvSpPr>
         <dsp:cNvPr id="0" name=""/>
         <dsp:cNvSpPr/>
       </dsp:nvSpPr>
       <dsp:spPr>
         <a:xfrm>
-          <a:off x="837512" y="3404"/>
-          <a:ext cx="7049187" cy="725119"/>
+          <a:off x="5079499" y="1185451"/>
+          <a:ext cx="492856" cy="91440"/>
         </a:xfrm>
-        <a:prstGeom prst="rect">
+        <a:custGeom>
           <a:avLst/>
-        </a:prstGeom>
+          <a:gdLst/>
+          <a:ahLst/>
+          <a:cxnLst/>
+          <a:rect l="0" t="0" r="0" b="0"/>
+          <a:pathLst>
+            <a:path>
+              <a:moveTo>
+                <a:pt x="0" y="45720"/>
+              </a:moveTo>
+              <a:lnTo>
+                <a:pt x="492856" y="45720"/>
+              </a:lnTo>
+            </a:path>
+          </a:pathLst>
+        </a:custGeom>
         <a:noFill/>
-        <a:ln>
-          <a:noFill/>
+        <a:ln w="9525" cap="flat" cmpd="sng" algn="ctr">
+          <a:solidFill>
+            <a:schemeClr val="accent3">
+              <a:hueOff val="0"/>
+              <a:satOff val="0"/>
+              <a:lumOff val="0"/>
+              <a:alphaOff val="0"/>
+            </a:schemeClr>
+          </a:solidFill>
+          <a:prstDash val="solid"/>
+          <a:tailEnd type="arrow"/>
         </a:ln>
         <a:effectLst/>
       </dsp:spPr>
       <dsp:style>
-        <a:lnRef idx="0">
+        <a:lnRef idx="1">
           <a:scrgbClr r="0" g="0" b="0"/>
         </a:lnRef>
         <a:fillRef idx="0">
@@ -9988,12 +9904,12 @@
         <a:fontRef idx="minor"/>
       </dsp:style>
       <dsp:txBody>
-        <a:bodyPr spcFirstLastPara="0" vert="horz" wrap="square" lIns="76742" tIns="76742" rIns="76742" bIns="76742" numCol="1" spcCol="1270" anchor="ctr" anchorCtr="0">
+        <a:bodyPr spcFirstLastPara="0" vert="horz" wrap="square" lIns="12700" tIns="0" rIns="12700" bIns="0" numCol="1" spcCol="1270" anchor="ctr" anchorCtr="0">
           <a:noAutofit/>
         </a:bodyPr>
         <a:lstStyle/>
         <a:p>
-          <a:pPr marL="0" lvl="0" indent="0" algn="l" defTabSz="844550">
+          <a:pPr marL="0" lvl="0" indent="0" algn="ctr" defTabSz="222250">
             <a:lnSpc>
               <a:spcPct val="90000"/>
             </a:lnSpc>
@@ -10005,31 +9921,26 @@
             </a:spcAft>
             <a:buNone/>
           </a:pPr>
-          <a:r>
-            <a:rPr lang="en-US" sz="1900" kern="1200"/>
-            <a:t>1. Eliminate Paper Trails: Store 100% of registrations on secured cloud.</a:t>
-          </a:r>
+          <a:endParaRPr lang="en-US" sz="500" kern="1200"/>
         </a:p>
       </dsp:txBody>
       <dsp:txXfrm>
-        <a:off x="837512" y="3404"/>
-        <a:ext cx="7049187" cy="725119"/>
+        <a:off x="5312841" y="1228553"/>
+        <a:ext cx="26172" cy="5234"/>
       </dsp:txXfrm>
     </dsp:sp>
-    <dsp:sp modelId="{5A79B7A7-F09F-4928-BC2F-03E2E132C5FA}">
+    <dsp:sp modelId="{8A589B51-1154-4174-8272-2DA394768254}">
       <dsp:nvSpPr>
         <dsp:cNvPr id="0" name=""/>
         <dsp:cNvSpPr/>
       </dsp:nvSpPr>
       <dsp:spPr>
         <a:xfrm>
-          <a:off x="0" y="909803"/>
-          <a:ext cx="7886700" cy="725119"/>
+          <a:off x="2805400" y="548401"/>
+          <a:ext cx="2275898" cy="1365538"/>
         </a:xfrm>
-        <a:prstGeom prst="roundRect">
-          <a:avLst>
-            <a:gd name="adj" fmla="val 10000"/>
-          </a:avLst>
+        <a:prstGeom prst="rect">
+          <a:avLst/>
         </a:prstGeom>
         <a:solidFill>
           <a:schemeClr val="accent3">
@@ -10039,54 +9950,15 @@
             <a:alphaOff val="0"/>
           </a:schemeClr>
         </a:solidFill>
-        <a:ln>
-          <a:noFill/>
-        </a:ln>
-        <a:effectLst/>
-      </dsp:spPr>
-      <dsp:style>
-        <a:lnRef idx="0">
-          <a:scrgbClr r="0" g="0" b="0"/>
-        </a:lnRef>
-        <a:fillRef idx="1">
-          <a:scrgbClr r="0" g="0" b="0"/>
-        </a:fillRef>
-        <a:effectRef idx="0">
-          <a:scrgbClr r="0" g="0" b="0"/>
-        </a:effectRef>
-        <a:fontRef idx="minor"/>
-      </dsp:style>
-    </dsp:sp>
-    <dsp:sp modelId="{E4A571BB-2629-4794-B99D-2445677D8064}">
-      <dsp:nvSpPr>
-        <dsp:cNvPr id="0" name=""/>
-        <dsp:cNvSpPr/>
-      </dsp:nvSpPr>
-      <dsp:spPr>
-        <a:xfrm>
-          <a:off x="219348" y="1072955"/>
-          <a:ext cx="398815" cy="398815"/>
-        </a:xfrm>
-        <a:prstGeom prst="rect">
-          <a:avLst/>
-        </a:prstGeom>
-        <a:blipFill>
-          <a:blip xmlns:r="http://schemas.openxmlformats.org/officeDocument/2006/relationships">
-            <a:extLst>
-              <a:ext uri="{28A0092B-C50C-407E-A947-70E740481C1C}">
-                <a14:useLocalDpi xmlns:a14="http://schemas.microsoft.com/office/drawing/2010/main" val="0"/>
-              </a:ext>
-              <a:ext uri="{96DAC541-7B7A-43D3-8B79-37D633B846F1}">
-                <asvg:svgBlip xmlns:asvg="http://schemas.microsoft.com/office/drawing/2016/SVG/main" r:embed="rId2"/>
-              </a:ext>
-            </a:extLst>
-          </a:blip>
-          <a:stretch>
-            <a:fillRect/>
-          </a:stretch>
-        </a:blipFill>
         <a:ln w="25400" cap="flat" cmpd="sng" algn="ctr">
-          <a:noFill/>
+          <a:solidFill>
+            <a:schemeClr val="lt1">
+              <a:hueOff val="0"/>
+              <a:satOff val="0"/>
+              <a:lumOff val="0"/>
+              <a:alphaOff val="0"/>
+            </a:schemeClr>
+          </a:solidFill>
           <a:prstDash val="solid"/>
         </a:ln>
         <a:effectLst/>
@@ -10105,28 +9977,85 @@
           <a:schemeClr val="lt1"/>
         </a:fontRef>
       </dsp:style>
+      <dsp:txBody>
+        <a:bodyPr spcFirstLastPara="0" vert="horz" wrap="square" lIns="111521" tIns="117061" rIns="111521" bIns="117061" numCol="1" spcCol="1270" anchor="ctr" anchorCtr="0">
+          <a:noAutofit/>
+        </a:bodyPr>
+        <a:lstStyle/>
+        <a:p>
+          <a:pPr marL="0" lvl="0" indent="0" algn="ctr" defTabSz="711200">
+            <a:lnSpc>
+              <a:spcPct val="100000"/>
+            </a:lnSpc>
+            <a:spcBef>
+              <a:spcPct val="0"/>
+            </a:spcBef>
+            <a:spcAft>
+              <a:spcPct val="35000"/>
+            </a:spcAft>
+            <a:buNone/>
+          </a:pPr>
+          <a:r>
+            <a:rPr lang="en-US" sz="1600" kern="1200"/>
+            <a:t>2. Optimize Check-in Efficiency: Dramatically cut queue times.</a:t>
+          </a:r>
+        </a:p>
+      </dsp:txBody>
+      <dsp:txXfrm>
+        <a:off x="2805400" y="548401"/>
+        <a:ext cx="2275898" cy="1365538"/>
+      </dsp:txXfrm>
     </dsp:sp>
-    <dsp:sp modelId="{FD55D884-7680-49DF-A13F-8045DC9CA1C3}">
+    <dsp:sp modelId="{3F7FD82D-24C4-4DE3-AAB3-29775AD3E6AE}">
       <dsp:nvSpPr>
         <dsp:cNvPr id="0" name=""/>
         <dsp:cNvSpPr/>
       </dsp:nvSpPr>
       <dsp:spPr>
         <a:xfrm>
-          <a:off x="837512" y="909803"/>
-          <a:ext cx="7049187" cy="725119"/>
+          <a:off x="1143995" y="1912140"/>
+          <a:ext cx="5598709" cy="492856"/>
         </a:xfrm>
-        <a:prstGeom prst="rect">
+        <a:custGeom>
           <a:avLst/>
-        </a:prstGeom>
+          <a:gdLst/>
+          <a:ahLst/>
+          <a:cxnLst/>
+          <a:rect l="0" t="0" r="0" b="0"/>
+          <a:pathLst>
+            <a:path>
+              <a:moveTo>
+                <a:pt x="5598709" y="0"/>
+              </a:moveTo>
+              <a:lnTo>
+                <a:pt x="5598709" y="263528"/>
+              </a:lnTo>
+              <a:lnTo>
+                <a:pt x="0" y="263528"/>
+              </a:lnTo>
+              <a:lnTo>
+                <a:pt x="0" y="492856"/>
+              </a:lnTo>
+            </a:path>
+          </a:pathLst>
+        </a:custGeom>
         <a:noFill/>
-        <a:ln>
-          <a:noFill/>
+        <a:ln w="9525" cap="flat" cmpd="sng" algn="ctr">
+          <a:solidFill>
+            <a:schemeClr val="accent4">
+              <a:hueOff val="0"/>
+              <a:satOff val="0"/>
+              <a:lumOff val="0"/>
+              <a:alphaOff val="0"/>
+            </a:schemeClr>
+          </a:solidFill>
+          <a:prstDash val="solid"/>
+          <a:tailEnd type="arrow"/>
         </a:ln>
         <a:effectLst/>
       </dsp:spPr>
       <dsp:style>
-        <a:lnRef idx="0">
+        <a:lnRef idx="1">
           <a:scrgbClr r="0" g="0" b="0"/>
         </a:lnRef>
         <a:fillRef idx="0">
@@ -10138,12 +10067,12 @@
         <a:fontRef idx="minor"/>
       </dsp:style>
       <dsp:txBody>
-        <a:bodyPr spcFirstLastPara="0" vert="horz" wrap="square" lIns="76742" tIns="76742" rIns="76742" bIns="76742" numCol="1" spcCol="1270" anchor="ctr" anchorCtr="0">
+        <a:bodyPr spcFirstLastPara="0" vert="horz" wrap="square" lIns="12700" tIns="0" rIns="12700" bIns="0" numCol="1" spcCol="1270" anchor="ctr" anchorCtr="0">
           <a:noAutofit/>
         </a:bodyPr>
         <a:lstStyle/>
         <a:p>
-          <a:pPr marL="0" lvl="0" indent="0" algn="l" defTabSz="844550">
+          <a:pPr marL="0" lvl="0" indent="0" algn="ctr" defTabSz="222250">
             <a:lnSpc>
               <a:spcPct val="90000"/>
             </a:lnSpc>
@@ -10155,31 +10084,26 @@
             </a:spcAft>
             <a:buNone/>
           </a:pPr>
-          <a:r>
-            <a:rPr lang="en-US" sz="1900" kern="1200"/>
-            <a:t>2. Optimize Check-in Efficiency: Dramatically cut queue times.</a:t>
-          </a:r>
+          <a:endParaRPr lang="en-US" sz="500" kern="1200"/>
         </a:p>
       </dsp:txBody>
       <dsp:txXfrm>
-        <a:off x="837512" y="909803"/>
-        <a:ext cx="7049187" cy="725119"/>
+        <a:off x="3802771" y="2155951"/>
+        <a:ext cx="281156" cy="5234"/>
       </dsp:txXfrm>
     </dsp:sp>
-    <dsp:sp modelId="{1EA309E1-79A5-48A2-8603-EB1BB9CFB6E4}">
+    <dsp:sp modelId="{CFFC8878-53E2-45FA-96F9-B5D0F738E669}">
       <dsp:nvSpPr>
         <dsp:cNvPr id="0" name=""/>
         <dsp:cNvSpPr/>
       </dsp:nvSpPr>
       <dsp:spPr>
         <a:xfrm>
-          <a:off x="0" y="1816202"/>
-          <a:ext cx="7886700" cy="725119"/>
+          <a:off x="5604755" y="548401"/>
+          <a:ext cx="2275898" cy="1365538"/>
         </a:xfrm>
-        <a:prstGeom prst="roundRect">
-          <a:avLst>
-            <a:gd name="adj" fmla="val 10000"/>
-          </a:avLst>
+        <a:prstGeom prst="rect">
+          <a:avLst/>
         </a:prstGeom>
         <a:solidFill>
           <a:schemeClr val="accent4">
@@ -10189,54 +10113,15 @@
             <a:alphaOff val="0"/>
           </a:schemeClr>
         </a:solidFill>
-        <a:ln>
-          <a:noFill/>
-        </a:ln>
-        <a:effectLst/>
-      </dsp:spPr>
-      <dsp:style>
-        <a:lnRef idx="0">
-          <a:scrgbClr r="0" g="0" b="0"/>
-        </a:lnRef>
-        <a:fillRef idx="1">
-          <a:scrgbClr r="0" g="0" b="0"/>
-        </a:fillRef>
-        <a:effectRef idx="0">
-          <a:scrgbClr r="0" g="0" b="0"/>
-        </a:effectRef>
-        <a:fontRef idx="minor"/>
-      </dsp:style>
-    </dsp:sp>
-    <dsp:sp modelId="{790635CA-92B8-4D43-8C44-9AC7F7329CE3}">
-      <dsp:nvSpPr>
-        <dsp:cNvPr id="0" name=""/>
-        <dsp:cNvSpPr/>
-      </dsp:nvSpPr>
-      <dsp:spPr>
-        <a:xfrm>
-          <a:off x="219348" y="1979354"/>
-          <a:ext cx="398815" cy="398815"/>
-        </a:xfrm>
-        <a:prstGeom prst="rect">
-          <a:avLst/>
-        </a:prstGeom>
-        <a:blipFill>
-          <a:blip xmlns:r="http://schemas.openxmlformats.org/officeDocument/2006/relationships">
-            <a:extLst>
-              <a:ext uri="{28A0092B-C50C-407E-A947-70E740481C1C}">
-                <a14:useLocalDpi xmlns:a14="http://schemas.microsoft.com/office/drawing/2010/main" val="0"/>
-              </a:ext>
-              <a:ext uri="{96DAC541-7B7A-43D3-8B79-37D633B846F1}">
-                <asvg:svgBlip xmlns:asvg="http://schemas.microsoft.com/office/drawing/2016/SVG/main" r:embed="rId3"/>
-              </a:ext>
-            </a:extLst>
-          </a:blip>
-          <a:stretch>
-            <a:fillRect/>
-          </a:stretch>
-        </a:blipFill>
         <a:ln w="25400" cap="flat" cmpd="sng" algn="ctr">
-          <a:noFill/>
+          <a:solidFill>
+            <a:schemeClr val="lt1">
+              <a:hueOff val="0"/>
+              <a:satOff val="0"/>
+              <a:lumOff val="0"/>
+              <a:alphaOff val="0"/>
+            </a:schemeClr>
+          </a:solidFill>
           <a:prstDash val="solid"/>
         </a:ln>
         <a:effectLst/>
@@ -10255,28 +10140,79 @@
           <a:schemeClr val="lt1"/>
         </a:fontRef>
       </dsp:style>
+      <dsp:txBody>
+        <a:bodyPr spcFirstLastPara="0" vert="horz" wrap="square" lIns="111521" tIns="117061" rIns="111521" bIns="117061" numCol="1" spcCol="1270" anchor="ctr" anchorCtr="0">
+          <a:noAutofit/>
+        </a:bodyPr>
+        <a:lstStyle/>
+        <a:p>
+          <a:pPr marL="0" lvl="0" indent="0" algn="ctr" defTabSz="711200">
+            <a:lnSpc>
+              <a:spcPct val="100000"/>
+            </a:lnSpc>
+            <a:spcBef>
+              <a:spcPct val="0"/>
+            </a:spcBef>
+            <a:spcAft>
+              <a:spcPct val="35000"/>
+            </a:spcAft>
+            <a:buNone/>
+          </a:pPr>
+          <a:r>
+            <a:rPr lang="en-US" sz="1600" kern="1200"/>
+            <a:t>3. Automate Validations: Establish a flawless digital payment (UTR) workflow.</a:t>
+          </a:r>
+        </a:p>
+      </dsp:txBody>
+      <dsp:txXfrm>
+        <a:off x="5604755" y="548401"/>
+        <a:ext cx="2275898" cy="1365538"/>
+      </dsp:txXfrm>
     </dsp:sp>
-    <dsp:sp modelId="{FDC4A94C-0301-4FB9-9F8D-D9123515AF05}">
+    <dsp:sp modelId="{D7B0C0DE-D128-4D8C-90FA-2D74305EE8CB}">
       <dsp:nvSpPr>
         <dsp:cNvPr id="0" name=""/>
         <dsp:cNvSpPr/>
       </dsp:nvSpPr>
       <dsp:spPr>
         <a:xfrm>
-          <a:off x="837512" y="1816202"/>
-          <a:ext cx="7049187" cy="725119"/>
+          <a:off x="2280144" y="3074446"/>
+          <a:ext cx="492856" cy="91440"/>
         </a:xfrm>
-        <a:prstGeom prst="rect">
+        <a:custGeom>
           <a:avLst/>
-        </a:prstGeom>
+          <a:gdLst/>
+          <a:ahLst/>
+          <a:cxnLst/>
+          <a:rect l="0" t="0" r="0" b="0"/>
+          <a:pathLst>
+            <a:path>
+              <a:moveTo>
+                <a:pt x="0" y="45720"/>
+              </a:moveTo>
+              <a:lnTo>
+                <a:pt x="492856" y="45720"/>
+              </a:lnTo>
+            </a:path>
+          </a:pathLst>
+        </a:custGeom>
         <a:noFill/>
-        <a:ln>
-          <a:noFill/>
+        <a:ln w="9525" cap="flat" cmpd="sng" algn="ctr">
+          <a:solidFill>
+            <a:schemeClr val="accent5">
+              <a:hueOff val="0"/>
+              <a:satOff val="0"/>
+              <a:lumOff val="0"/>
+              <a:alphaOff val="0"/>
+            </a:schemeClr>
+          </a:solidFill>
+          <a:prstDash val="solid"/>
+          <a:tailEnd type="arrow"/>
         </a:ln>
         <a:effectLst/>
       </dsp:spPr>
       <dsp:style>
-        <a:lnRef idx="0">
+        <a:lnRef idx="1">
           <a:scrgbClr r="0" g="0" b="0"/>
         </a:lnRef>
         <a:fillRef idx="0">
@@ -10288,12 +10224,12 @@
         <a:fontRef idx="minor"/>
       </dsp:style>
       <dsp:txBody>
-        <a:bodyPr spcFirstLastPara="0" vert="horz" wrap="square" lIns="76742" tIns="76742" rIns="76742" bIns="76742" numCol="1" spcCol="1270" anchor="ctr" anchorCtr="0">
+        <a:bodyPr spcFirstLastPara="0" vert="horz" wrap="square" lIns="12700" tIns="0" rIns="12700" bIns="0" numCol="1" spcCol="1270" anchor="ctr" anchorCtr="0">
           <a:noAutofit/>
         </a:bodyPr>
         <a:lstStyle/>
         <a:p>
-          <a:pPr marL="0" lvl="0" indent="0" algn="l" defTabSz="844550">
+          <a:pPr marL="0" lvl="0" indent="0" algn="ctr" defTabSz="222250">
             <a:lnSpc>
               <a:spcPct val="90000"/>
             </a:lnSpc>
@@ -10305,31 +10241,26 @@
             </a:spcAft>
             <a:buNone/>
           </a:pPr>
-          <a:r>
-            <a:rPr lang="en-US" sz="1900" kern="1200"/>
-            <a:t>3. Automate Validations: Establish a flawless digital payment (UTR) workflow.</a:t>
-          </a:r>
+          <a:endParaRPr lang="en-US" sz="500" kern="1200"/>
         </a:p>
       </dsp:txBody>
       <dsp:txXfrm>
-        <a:off x="837512" y="1816202"/>
-        <a:ext cx="7049187" cy="725119"/>
+        <a:off x="2513486" y="3117549"/>
+        <a:ext cx="26172" cy="5234"/>
       </dsp:txXfrm>
     </dsp:sp>
-    <dsp:sp modelId="{483E1126-C15D-4999-B28C-44BB75A5A80A}">
+    <dsp:sp modelId="{E9C2EF27-20E0-4600-82A7-9DDF08AB8A39}">
       <dsp:nvSpPr>
         <dsp:cNvPr id="0" name=""/>
         <dsp:cNvSpPr/>
       </dsp:nvSpPr>
       <dsp:spPr>
         <a:xfrm>
-          <a:off x="0" y="2722601"/>
-          <a:ext cx="7886700" cy="725119"/>
+          <a:off x="6045" y="2437397"/>
+          <a:ext cx="2275898" cy="1365538"/>
         </a:xfrm>
-        <a:prstGeom prst="roundRect">
-          <a:avLst>
-            <a:gd name="adj" fmla="val 10000"/>
-          </a:avLst>
+        <a:prstGeom prst="rect">
+          <a:avLst/>
         </a:prstGeom>
         <a:solidFill>
           <a:schemeClr val="accent5">
@@ -10339,54 +10270,15 @@
             <a:alphaOff val="0"/>
           </a:schemeClr>
         </a:solidFill>
-        <a:ln>
-          <a:noFill/>
-        </a:ln>
-        <a:effectLst/>
-      </dsp:spPr>
-      <dsp:style>
-        <a:lnRef idx="0">
-          <a:scrgbClr r="0" g="0" b="0"/>
-        </a:lnRef>
-        <a:fillRef idx="1">
-          <a:scrgbClr r="0" g="0" b="0"/>
-        </a:fillRef>
-        <a:effectRef idx="0">
-          <a:scrgbClr r="0" g="0" b="0"/>
-        </a:effectRef>
-        <a:fontRef idx="minor"/>
-      </dsp:style>
-    </dsp:sp>
-    <dsp:sp modelId="{3B2195C6-028A-423E-960B-4502B5CA64A1}">
-      <dsp:nvSpPr>
-        <dsp:cNvPr id="0" name=""/>
-        <dsp:cNvSpPr/>
-      </dsp:nvSpPr>
-      <dsp:spPr>
-        <a:xfrm>
-          <a:off x="219348" y="2885753"/>
-          <a:ext cx="398815" cy="398815"/>
-        </a:xfrm>
-        <a:prstGeom prst="rect">
-          <a:avLst/>
-        </a:prstGeom>
-        <a:blipFill>
-          <a:blip xmlns:r="http://schemas.openxmlformats.org/officeDocument/2006/relationships">
-            <a:extLst>
-              <a:ext uri="{28A0092B-C50C-407E-A947-70E740481C1C}">
-                <a14:useLocalDpi xmlns:a14="http://schemas.microsoft.com/office/drawing/2010/main" val="0"/>
-              </a:ext>
-              <a:ext uri="{96DAC541-7B7A-43D3-8B79-37D633B846F1}">
-                <asvg:svgBlip xmlns:asvg="http://schemas.microsoft.com/office/drawing/2016/SVG/main" r:embed="rId4"/>
-              </a:ext>
-            </a:extLst>
-          </a:blip>
-          <a:stretch>
-            <a:fillRect/>
-          </a:stretch>
-        </a:blipFill>
         <a:ln w="25400" cap="flat" cmpd="sng" algn="ctr">
-          <a:noFill/>
+          <a:solidFill>
+            <a:schemeClr val="lt1">
+              <a:hueOff val="0"/>
+              <a:satOff val="0"/>
+              <a:lumOff val="0"/>
+              <a:alphaOff val="0"/>
+            </a:schemeClr>
+          </a:solidFill>
           <a:prstDash val="solid"/>
         </a:ln>
         <a:effectLst/>
@@ -10405,47 +10297,15 @@
           <a:schemeClr val="lt1"/>
         </a:fontRef>
       </dsp:style>
-    </dsp:sp>
-    <dsp:sp modelId="{DF61D090-0D23-4AAA-9782-1A420A872FF1}">
-      <dsp:nvSpPr>
-        <dsp:cNvPr id="0" name=""/>
-        <dsp:cNvSpPr/>
-      </dsp:nvSpPr>
-      <dsp:spPr>
-        <a:xfrm>
-          <a:off x="837512" y="2722601"/>
-          <a:ext cx="7049187" cy="725119"/>
-        </a:xfrm>
-        <a:prstGeom prst="rect">
-          <a:avLst/>
-        </a:prstGeom>
-        <a:noFill/>
-        <a:ln>
-          <a:noFill/>
-        </a:ln>
-        <a:effectLst/>
-      </dsp:spPr>
-      <dsp:style>
-        <a:lnRef idx="0">
-          <a:scrgbClr r="0" g="0" b="0"/>
-        </a:lnRef>
-        <a:fillRef idx="0">
-          <a:scrgbClr r="0" g="0" b="0"/>
-        </a:fillRef>
-        <a:effectRef idx="0">
-          <a:scrgbClr r="0" g="0" b="0"/>
-        </a:effectRef>
-        <a:fontRef idx="minor"/>
-      </dsp:style>
       <dsp:txBody>
-        <a:bodyPr spcFirstLastPara="0" vert="horz" wrap="square" lIns="76742" tIns="76742" rIns="76742" bIns="76742" numCol="1" spcCol="1270" anchor="ctr" anchorCtr="0">
+        <a:bodyPr spcFirstLastPara="0" vert="horz" wrap="square" lIns="111521" tIns="117061" rIns="111521" bIns="117061" numCol="1" spcCol="1270" anchor="ctr" anchorCtr="0">
           <a:noAutofit/>
         </a:bodyPr>
         <a:lstStyle/>
         <a:p>
-          <a:pPr marL="0" lvl="0" indent="0" algn="l" defTabSz="844550">
+          <a:pPr marL="0" lvl="0" indent="0" algn="ctr" defTabSz="711200">
             <a:lnSpc>
-              <a:spcPct val="90000"/>
+              <a:spcPct val="100000"/>
             </a:lnSpc>
             <a:spcBef>
               <a:spcPct val="0"/>
@@ -10456,30 +10316,28 @@
             <a:buNone/>
           </a:pPr>
           <a:r>
-            <a:rPr lang="en-US" sz="1900" kern="1200"/>
+            <a:rPr lang="en-US" sz="1600" kern="1200"/>
             <a:t>4. Zero-Touch Rewards: Overlay names algorithmically for certificates.</a:t>
           </a:r>
         </a:p>
       </dsp:txBody>
       <dsp:txXfrm>
-        <a:off x="837512" y="2722601"/>
-        <a:ext cx="7049187" cy="725119"/>
+        <a:off x="6045" y="2437397"/>
+        <a:ext cx="2275898" cy="1365538"/>
       </dsp:txXfrm>
     </dsp:sp>
-    <dsp:sp modelId="{18069744-4EC7-47B9-8F91-5F78C99F652F}">
+    <dsp:sp modelId="{716CA9B1-0CF5-484E-980A-13F54B05F17A}">
       <dsp:nvSpPr>
         <dsp:cNvPr id="0" name=""/>
         <dsp:cNvSpPr/>
       </dsp:nvSpPr>
       <dsp:spPr>
         <a:xfrm>
-          <a:off x="0" y="3629000"/>
-          <a:ext cx="7886700" cy="725119"/>
+          <a:off x="2805400" y="2437397"/>
+          <a:ext cx="2275898" cy="1365538"/>
         </a:xfrm>
-        <a:prstGeom prst="roundRect">
-          <a:avLst>
-            <a:gd name="adj" fmla="val 10000"/>
-          </a:avLst>
+        <a:prstGeom prst="rect">
+          <a:avLst/>
         </a:prstGeom>
         <a:solidFill>
           <a:schemeClr val="accent6">
@@ -10489,54 +10347,15 @@
             <a:alphaOff val="0"/>
           </a:schemeClr>
         </a:solidFill>
-        <a:ln>
-          <a:noFill/>
-        </a:ln>
-        <a:effectLst/>
-      </dsp:spPr>
-      <dsp:style>
-        <a:lnRef idx="0">
-          <a:scrgbClr r="0" g="0" b="0"/>
-        </a:lnRef>
-        <a:fillRef idx="1">
-          <a:scrgbClr r="0" g="0" b="0"/>
-        </a:fillRef>
-        <a:effectRef idx="0">
-          <a:scrgbClr r="0" g="0" b="0"/>
-        </a:effectRef>
-        <a:fontRef idx="minor"/>
-      </dsp:style>
-    </dsp:sp>
-    <dsp:sp modelId="{FD2C4B67-76A7-4493-9A76-8458253A2B1C}">
-      <dsp:nvSpPr>
-        <dsp:cNvPr id="0" name=""/>
-        <dsp:cNvSpPr/>
-      </dsp:nvSpPr>
-      <dsp:spPr>
-        <a:xfrm>
-          <a:off x="219348" y="3792152"/>
-          <a:ext cx="398815" cy="398815"/>
-        </a:xfrm>
-        <a:prstGeom prst="rect">
-          <a:avLst/>
-        </a:prstGeom>
-        <a:blipFill>
-          <a:blip xmlns:r="http://schemas.openxmlformats.org/officeDocument/2006/relationships">
-            <a:extLst>
-              <a:ext uri="{28A0092B-C50C-407E-A947-70E740481C1C}">
-                <a14:useLocalDpi xmlns:a14="http://schemas.microsoft.com/office/drawing/2010/main" val="0"/>
-              </a:ext>
-              <a:ext uri="{96DAC541-7B7A-43D3-8B79-37D633B846F1}">
-                <asvg:svgBlip xmlns:asvg="http://schemas.microsoft.com/office/drawing/2016/SVG/main" r:embed="rId5"/>
-              </a:ext>
-            </a:extLst>
-          </a:blip>
-          <a:stretch>
-            <a:fillRect/>
-          </a:stretch>
-        </a:blipFill>
         <a:ln w="25400" cap="flat" cmpd="sng" algn="ctr">
-          <a:noFill/>
+          <a:solidFill>
+            <a:schemeClr val="lt1">
+              <a:hueOff val="0"/>
+              <a:satOff val="0"/>
+              <a:lumOff val="0"/>
+              <a:alphaOff val="0"/>
+            </a:schemeClr>
+          </a:solidFill>
           <a:prstDash val="solid"/>
         </a:ln>
         <a:effectLst/>
@@ -10555,47 +10374,15 @@
           <a:schemeClr val="lt1"/>
         </a:fontRef>
       </dsp:style>
-    </dsp:sp>
-    <dsp:sp modelId="{72E2F59E-2298-4148-A90A-774231C1F927}">
-      <dsp:nvSpPr>
-        <dsp:cNvPr id="0" name=""/>
-        <dsp:cNvSpPr/>
-      </dsp:nvSpPr>
-      <dsp:spPr>
-        <a:xfrm>
-          <a:off x="837512" y="3629000"/>
-          <a:ext cx="7049187" cy="725119"/>
-        </a:xfrm>
-        <a:prstGeom prst="rect">
-          <a:avLst/>
-        </a:prstGeom>
-        <a:noFill/>
-        <a:ln>
-          <a:noFill/>
-        </a:ln>
-        <a:effectLst/>
-      </dsp:spPr>
-      <dsp:style>
-        <a:lnRef idx="0">
-          <a:scrgbClr r="0" g="0" b="0"/>
-        </a:lnRef>
-        <a:fillRef idx="0">
-          <a:scrgbClr r="0" g="0" b="0"/>
-        </a:fillRef>
-        <a:effectRef idx="0">
-          <a:scrgbClr r="0" g="0" b="0"/>
-        </a:effectRef>
-        <a:fontRef idx="minor"/>
-      </dsp:style>
       <dsp:txBody>
-        <a:bodyPr spcFirstLastPara="0" vert="horz" wrap="square" lIns="76742" tIns="76742" rIns="76742" bIns="76742" numCol="1" spcCol="1270" anchor="ctr" anchorCtr="0">
+        <a:bodyPr spcFirstLastPara="0" vert="horz" wrap="square" lIns="111521" tIns="117061" rIns="111521" bIns="117061" numCol="1" spcCol="1270" anchor="ctr" anchorCtr="0">
           <a:noAutofit/>
         </a:bodyPr>
         <a:lstStyle/>
         <a:p>
-          <a:pPr marL="0" lvl="0" indent="0" algn="l" defTabSz="844550">
+          <a:pPr marL="0" lvl="0" indent="0" algn="ctr" defTabSz="711200">
             <a:lnSpc>
-              <a:spcPct val="90000"/>
+              <a:spcPct val="100000"/>
             </a:lnSpc>
             <a:spcBef>
               <a:spcPct val="0"/>
@@ -10606,14 +10393,14 @@
             <a:buNone/>
           </a:pPr>
           <a:r>
-            <a:rPr lang="en-US" sz="1900" kern="1200"/>
+            <a:rPr lang="en-US" sz="1600" kern="1200"/>
             <a:t>5. Provide Real-Time Analytics via strict RBAC.</a:t>
           </a:r>
         </a:p>
       </dsp:txBody>
       <dsp:txXfrm>
-        <a:off x="837512" y="3629000"/>
-        <a:ext cx="7049187" cy="725119"/>
+        <a:off x="2805400" y="2437397"/>
+        <a:ext cx="2275898" cy="1365538"/>
       </dsp:txXfrm>
     </dsp:sp>
   </dsp:spTree>
@@ -12599,49 +12386,97 @@
 </file>
 
 <file path=ppt/diagrams/layout4.xml><?xml version="1.0" encoding="utf-8"?>
-<dgm:layoutDef xmlns:dgm="http://schemas.openxmlformats.org/drawingml/2006/diagram" xmlns:a="http://schemas.openxmlformats.org/drawingml/2006/main" uniqueId="urn:microsoft.com/office/officeart/2018/2/layout/IconVerticalSolidList">
-  <dgm:title val="Icon Vertical Solid List"/>
-  <dgm:desc val="Use to show a series of visuals from top to bottom with Level 1 or Level 1 and Level 2 text grouped in a shape. Works best with icons or small pictures with lengthier descriptions."/>
+<dgm:layoutDef xmlns:dgm="http://schemas.openxmlformats.org/drawingml/2006/diagram" xmlns:a="http://schemas.openxmlformats.org/drawingml/2006/main" uniqueId="urn:microsoft.com/office/officeart/2016/7/layout/RepeatingBendingProcessNew">
+  <dgm:title val="Repeating Bending Process New"/>
+  <dgm:desc val=""/>
   <dgm:catLst>
-    <dgm:cat type="icon" pri="500"/>
+    <dgm:cat type="process" pri="500"/>
   </dgm:catLst>
-  <dgm:sampData useDef="1">
+  <dgm:sampData>
     <dgm:dataModel>
-      <dgm:ptLst/>
+      <dgm:ptLst>
+        <dgm:pt modelId="0" type="doc"/>
+        <dgm:pt modelId="1">
+          <dgm:prSet phldr="1"/>
+        </dgm:pt>
+        <dgm:pt modelId="2">
+          <dgm:prSet phldr="1"/>
+        </dgm:pt>
+        <dgm:pt modelId="3">
+          <dgm:prSet phldr="1"/>
+        </dgm:pt>
+        <dgm:pt modelId="4">
+          <dgm:prSet phldr="1"/>
+        </dgm:pt>
+        <dgm:pt modelId="5">
+          <dgm:prSet phldr="1"/>
+        </dgm:pt>
+      </dgm:ptLst>
+      <dgm:cxnLst>
+        <dgm:cxn modelId="7" srcId="0" destId="1" srcOrd="0" destOrd="0"/>
+        <dgm:cxn modelId="8" srcId="0" destId="2" srcOrd="1" destOrd="0"/>
+        <dgm:cxn modelId="9" srcId="0" destId="3" srcOrd="2" destOrd="0"/>
+        <dgm:cxn modelId="10" srcId="0" destId="4" srcOrd="3" destOrd="0"/>
+        <dgm:cxn modelId="11" srcId="0" destId="5" srcOrd="4" destOrd="0"/>
+      </dgm:cxnLst>
       <dgm:bg/>
       <dgm:whole/>
     </dgm:dataModel>
   </dgm:sampData>
-  <dgm:styleData useDef="1">
+  <dgm:styleData>
     <dgm:dataModel>
-      <dgm:ptLst/>
+      <dgm:ptLst>
+        <dgm:pt modelId="0" type="doc"/>
+        <dgm:pt modelId="1"/>
+        <dgm:pt modelId="2"/>
+      </dgm:ptLst>
+      <dgm:cxnLst>
+        <dgm:cxn modelId="3" srcId="0" destId="1" srcOrd="0" destOrd="0"/>
+        <dgm:cxn modelId="4" srcId="0" destId="2" srcOrd="1" destOrd="0"/>
+      </dgm:cxnLst>
       <dgm:bg/>
       <dgm:whole/>
     </dgm:dataModel>
   </dgm:styleData>
-  <dgm:clrData useDef="1">
+  <dgm:clrData>
     <dgm:dataModel>
-      <dgm:ptLst/>
+      <dgm:ptLst>
+        <dgm:pt modelId="0" type="doc"/>
+        <dgm:pt modelId="1"/>
+        <dgm:pt modelId="2"/>
+        <dgm:pt modelId="3"/>
+        <dgm:pt modelId="4"/>
+      </dgm:ptLst>
+      <dgm:cxnLst>
+        <dgm:cxn modelId="5" srcId="0" destId="1" srcOrd="0" destOrd="0"/>
+        <dgm:cxn modelId="6" srcId="0" destId="2" srcOrd="1" destOrd="0"/>
+        <dgm:cxn modelId="7" srcId="0" destId="3" srcOrd="2" destOrd="0"/>
+        <dgm:cxn modelId="8" srcId="0" destId="4" srcOrd="3" destOrd="0"/>
+      </dgm:cxnLst>
       <dgm:bg/>
       <dgm:whole/>
     </dgm:dataModel>
   </dgm:clrData>
-  <dgm:layoutNode name="root">
+  <dgm:layoutNode name="Name0">
     <dgm:varLst>
       <dgm:dir/>
       <dgm:resizeHandles val="exact"/>
     </dgm:varLst>
-    <dgm:choose name="Name0">
-      <dgm:if name="Name1" axis="self" func="var" arg="dir" op="equ" val="norm">
-        <dgm:alg type="lin">
-          <dgm:param type="linDir" val="fromT"/>
-          <dgm:param type="nodeHorzAlign" val="l"/>
+    <dgm:choose name="Name1">
+      <dgm:if name="Name2" axis="self" func="var" arg="dir" op="equ" val="norm">
+        <dgm:alg type="snake">
+          <dgm:param type="grDir" val="tL"/>
+          <dgm:param type="flowDir" val="row"/>
+          <dgm:param type="contDir" val="sameDir"/>
+          <dgm:param type="bkpt" val="endCnv"/>
         </dgm:alg>
       </dgm:if>
-      <dgm:else name="Name2">
-        <dgm:alg type="lin">
-          <dgm:param type="linDir" val="fromT"/>
-          <dgm:param type="nodeHorzAlign" val="r"/>
+      <dgm:else name="Name3">
+        <dgm:alg type="snake">
+          <dgm:param type="grDir" val="tR"/>
+          <dgm:param type="flowDir" val="row"/>
+          <dgm:param type="contDir" val="sameDir"/>
+          <dgm:param type="bkpt" val="endCnv"/>
         </dgm:alg>
       </dgm:else>
     </dgm:choose>
@@ -12649,246 +12484,96 @@
       <dgm:adjLst/>
     </dgm:shape>
     <dgm:presOf/>
-    <dgm:choose name="Name3">
-      <dgm:if name="Name4" axis="ch" ptType="node" func="cnt" op="lte" val="3">
-        <dgm:constrLst>
-          <dgm:constr type="h" for="ch" forName="compNode" refType="h" fact="0.3"/>
-          <dgm:constr type="w" for="ch" forName="compNode" refType="w"/>
-          <dgm:constr type="h" for="ch" forName="sibTrans" refType="h" refFor="ch" refForName="compNode" fact="0.25"/>
-          <dgm:constr type="primFontSz" for="des" forName="parTx" val="25"/>
-          <dgm:constr type="primFontSz" for="des" forName="desTx" refType="primFontSz" refFor="des" refForName="parTx" op="lte" fact="0.75"/>
-          <dgm:constr type="h" for="des" forName="compNode" op="equ"/>
-          <dgm:constr type="h" for="des" forName="bgRect" op="equ"/>
-          <dgm:constr type="h" for="des" forName="iconRect" op="equ"/>
-          <dgm:constr type="w" for="des" forName="iconRect" op="equ"/>
-          <dgm:constr type="h" for="des" forName="spaceRect" op="equ"/>
-          <dgm:constr type="h" for="des" forName="parTx" op="equ"/>
-          <dgm:constr type="h" for="des" forName="desTx" op="equ"/>
-        </dgm:constrLst>
-      </dgm:if>
-      <dgm:if name="Name5" axis="ch" ptType="node" func="cnt" op="lte" val="4">
-        <dgm:constrLst>
-          <dgm:constr type="h" for="ch" forName="compNode" refType="h" fact="0.3"/>
-          <dgm:constr type="w" for="ch" forName="compNode" refType="w"/>
-          <dgm:constr type="h" for="ch" forName="sibTrans" refType="h" refFor="ch" refForName="compNode" fact="0.25"/>
-          <dgm:constr type="primFontSz" for="des" forName="parTx" val="22"/>
-          <dgm:constr type="primFontSz" for="des" forName="desTx" refType="primFontSz" refFor="des" refForName="parTx" op="lte" fact="0.75"/>
-          <dgm:constr type="h" for="des" forName="compNode" op="equ"/>
-          <dgm:constr type="h" for="des" forName="bgRect" op="equ"/>
-          <dgm:constr type="h" for="des" forName="iconRect" op="equ"/>
-          <dgm:constr type="w" for="des" forName="iconRect" op="equ"/>
-          <dgm:constr type="h" for="des" forName="spaceRect" op="equ"/>
-          <dgm:constr type="h" for="des" forName="parTx" op="equ"/>
-          <dgm:constr type="h" for="des" forName="desTx" op="equ"/>
-        </dgm:constrLst>
-      </dgm:if>
-      <dgm:if name="Name6" axis="ch" ptType="node" func="cnt" op="lte" val="6">
-        <dgm:constrLst>
-          <dgm:constr type="h" for="ch" forName="compNode" refType="h" fact="0.3"/>
-          <dgm:constr type="w" for="ch" forName="compNode" refType="w"/>
-          <dgm:constr type="h" for="ch" forName="sibTrans" refType="h" refFor="ch" refForName="compNode" fact="0.25"/>
-          <dgm:constr type="primFontSz" for="des" forName="parTx" val="19"/>
-          <dgm:constr type="primFontSz" for="des" forName="desTx" refType="primFontSz" refFor="des" refForName="parTx" op="lte" fact="0.75"/>
-          <dgm:constr type="h" for="des" forName="compNode" op="equ"/>
-          <dgm:constr type="h" for="des" forName="bgRect" op="equ"/>
-          <dgm:constr type="h" for="des" forName="iconRect" op="equ"/>
-          <dgm:constr type="w" for="des" forName="iconRect" op="equ"/>
-          <dgm:constr type="h" for="des" forName="spaceRect" op="equ"/>
-          <dgm:constr type="h" for="des" forName="parTx" op="equ"/>
-          <dgm:constr type="h" for="des" forName="desTx" op="equ"/>
-        </dgm:constrLst>
-      </dgm:if>
-      <dgm:else name="Name7">
-        <dgm:constrLst>
-          <dgm:constr type="h" for="ch" forName="compNode" refType="h" fact="0.3"/>
-          <dgm:constr type="w" for="ch" forName="compNode" refType="w"/>
-          <dgm:constr type="h" for="ch" forName="sibTrans" refType="h" refFor="ch" refForName="compNode" fact="0.25"/>
-          <dgm:constr type="primFontSz" for="des" forName="parTx" val="16"/>
-          <dgm:constr type="primFontSz" for="des" forName="desTx" refType="primFontSz" refFor="des" refForName="parTx" op="lte" fact="0.75"/>
-          <dgm:constr type="h" for="des" forName="compNode" op="equ"/>
-          <dgm:constr type="h" for="des" forName="bgRect" op="equ"/>
-          <dgm:constr type="h" for="des" forName="iconRect" op="equ"/>
-          <dgm:constr type="w" for="des" forName="iconRect" op="equ"/>
-          <dgm:constr type="h" for="des" forName="spaceRect" op="equ"/>
-          <dgm:constr type="h" for="des" forName="parTx" op="equ"/>
-          <dgm:constr type="h" for="des" forName="desTx" op="equ"/>
-        </dgm:constrLst>
-      </dgm:else>
-    </dgm:choose>
-    <dgm:ruleLst>
-      <dgm:rule type="h" for="ch" forName="compNode" val="0" fact="NaN" max="NaN"/>
-    </dgm:ruleLst>
-    <dgm:forEach name="Name8" axis="ch" ptType="node">
-      <dgm:layoutNode name="compNode">
-        <dgm:alg type="composite"/>
-        <dgm:shape xmlns:r="http://schemas.openxmlformats.org/officeDocument/2006/relationships" r:blip="">
+    <dgm:constrLst>
+      <dgm:constr type="w" for="ch" ptType="node" refType="w"/>
+      <dgm:constr type="w" for="ch" forName="sibTrans" refType="w" refFor="ch" refPtType="node" op="equ" fact="0.23"/>
+      <dgm:constr type="sp" refType="w" refFor="ch" refForName="sibTrans" op="equ"/>
+      <dgm:constr type="userB" for="des" forName="connectorText" refType="sp"/>
+      <dgm:constr type="primFontSz" for="ch" ptType="node" op="equ" val="65"/>
+      <dgm:constr type="h" for="ch" ptType="sibTrans" op="equ"/>
+      <dgm:constr type="primFontSz" for="des" forName="connectorText" op="equ" val="55"/>
+      <dgm:constr type="primFontSz" for="des" forName="connectorText" refType="primFontSz" refFor="ch" refPtType="node" op="lte" fact="0.8"/>
+    </dgm:constrLst>
+    <dgm:ruleLst/>
+    <dgm:forEach name="nodesForEach" axis="ch" ptType="node">
+      <dgm:layoutNode name="node">
+        <dgm:varLst>
+          <dgm:bulletEnabled val="1"/>
+        </dgm:varLst>
+        <dgm:alg type="tx"/>
+        <dgm:shape xmlns:r="http://schemas.openxmlformats.org/officeDocument/2006/relationships" type="rect" r:blip="">
           <dgm:adjLst/>
         </dgm:shape>
-        <dgm:presOf axis="self"/>
-        <dgm:choose name="Name9">
-          <dgm:if name="Name10" axis="ch" ptType="node" func="cnt" op="gte" val="1">
-            <dgm:constrLst>
-              <dgm:constr type="w" for="ch" forName="bgRect" refType="w"/>
-              <dgm:constr type="h" for="ch" forName="bgRect" refType="h"/>
-              <dgm:constr type="l" for="ch" forName="bgRect"/>
-              <dgm:constr type="t" for="ch" forName="bgRect"/>
-              <dgm:constr type="h" for="ch" forName="iconRect" refType="h" fact="0.55"/>
-              <dgm:constr type="w" for="ch" forName="iconRect" refType="h" refFor="ch" refForName="iconRect"/>
-              <dgm:constr type="l" for="ch" forName="iconRect" refType="h" refFor="ch" refForName="iconRect" fact="0.55"/>
-              <dgm:constr type="ctrY" for="ch" forName="iconRect" refType="ctrY" refFor="ch" refForName="bgRect"/>
-              <dgm:constr type="w" for="ch" forName="spaceRect" refType="l" refFor="ch" refForName="iconRect"/>
-              <dgm:constr type="h" for="ch" forName="spaceRect" refType="h"/>
-              <dgm:constr type="l" for="ch" forName="spaceRect" refType="r" refFor="ch" refForName="iconRect"/>
-              <dgm:constr type="t" for="ch" forName="spaceRect"/>
-              <dgm:constr type="w" for="ch" forName="parTx" refType="w" fact="0.45"/>
-              <dgm:constr type="h" for="ch" forName="parTx" refType="h"/>
-              <dgm:constr type="l" for="ch" forName="parTx" refType="r" refFor="ch" refForName="spaceRect"/>
-              <dgm:constr type="t" for="ch" forName="parTx"/>
-              <dgm:constr type="h" for="ch" forName="desTx" refType="h"/>
-              <dgm:constr type="l" for="ch" forName="desTx" refType="r" refFor="ch" refForName="parTx"/>
-              <dgm:constr type="t" for="ch" forName="desTx"/>
-            </dgm:constrLst>
-          </dgm:if>
-          <dgm:else name="Name11">
-            <dgm:constrLst>
-              <dgm:constr type="w" for="ch" forName="bgRect" refType="w"/>
-              <dgm:constr type="h" for="ch" forName="bgRect" refType="h"/>
-              <dgm:constr type="l" for="ch" forName="bgRect"/>
-              <dgm:constr type="t" for="ch" forName="bgRect"/>
-              <dgm:constr type="h" for="ch" forName="iconRect" refType="h" fact="0.55"/>
-              <dgm:constr type="w" for="ch" forName="iconRect" refType="h" refFor="ch" refForName="iconRect"/>
-              <dgm:constr type="l" for="ch" forName="iconRect" refType="h" refFor="ch" refForName="iconRect" fact="0.55"/>
-              <dgm:constr type="ctrY" for="ch" forName="iconRect" refType="ctrY" refFor="ch" refForName="bgRect"/>
-              <dgm:constr type="w" for="ch" forName="spaceRect" refType="l" refFor="ch" refForName="iconRect"/>
-              <dgm:constr type="h" for="ch" forName="spaceRect" refType="h"/>
-              <dgm:constr type="l" for="ch" forName="spaceRect" refType="r" refFor="ch" refForName="iconRect"/>
-              <dgm:constr type="t" for="ch" forName="spaceRect"/>
-              <dgm:constr type="h" for="ch" forName="parTx" refType="h"/>
-              <dgm:constr type="l" for="ch" forName="parTx" refType="r" refFor="ch" refForName="spaceRect"/>
-              <dgm:constr type="t" for="ch" forName="parTx"/>
-            </dgm:constrLst>
-          </dgm:else>
-        </dgm:choose>
+        <dgm:presOf axis="desOrSelf" ptType="node"/>
+        <dgm:constrLst>
+          <dgm:constr type="h" refType="w" fact="0.6"/>
+          <dgm:constr type="tMarg" refType="h" fact="0.243"/>
+          <dgm:constr type="bMarg" refType="h" fact="0.243"/>
+          <dgm:constr type="lMarg" refType="w" fact="0.1389"/>
+          <dgm:constr type="rMarg" refType="w" fact="0.1389"/>
+        </dgm:constrLst>
         <dgm:ruleLst>
-          <dgm:rule type="h" val="INF" fact="NaN" max="NaN"/>
+          <dgm:rule type="primFontSz" val="12" fact="NaN" max="NaN"/>
         </dgm:ruleLst>
-        <dgm:layoutNode name="bgRect" styleLbl="bgShp">
-          <dgm:alg type="sp"/>
-          <dgm:shape xmlns:r="http://schemas.openxmlformats.org/officeDocument/2006/relationships" type="roundRect" r:blip="">
-            <dgm:adjLst>
-              <dgm:adj idx="1" val="0.1"/>
-            </dgm:adjLst>
-          </dgm:shape>
-          <dgm:presOf/>
-          <dgm:constrLst/>
-          <dgm:ruleLst/>
-        </dgm:layoutNode>
-        <dgm:layoutNode name="iconRect" styleLbl="node1">
-          <dgm:alg type="sp"/>
-          <dgm:shape xmlns:r="http://schemas.openxmlformats.org/officeDocument/2006/relationships" type="rect" r:blip="" blipPhldr="1">
-            <dgm:adjLst/>
-          </dgm:shape>
-          <dgm:presOf/>
-          <dgm:constrLst/>
-          <dgm:ruleLst/>
-        </dgm:layoutNode>
-        <dgm:layoutNode name="spaceRect">
-          <dgm:alg type="sp"/>
-          <dgm:shape xmlns:r="http://schemas.openxmlformats.org/officeDocument/2006/relationships" r:blip="">
-            <dgm:adjLst/>
-          </dgm:shape>
-          <dgm:presOf/>
-          <dgm:constrLst/>
-          <dgm:ruleLst/>
-        </dgm:layoutNode>
-        <dgm:layoutNode name="parTx" styleLbl="revTx">
-          <dgm:varLst>
-            <dgm:chMax val="0"/>
-            <dgm:chPref val="0"/>
-          </dgm:varLst>
-          <dgm:alg type="tx">
-            <dgm:param type="txAnchorVert" val="mid"/>
-            <dgm:param type="parTxLTRAlign" val="l"/>
-            <dgm:param type="shpTxLTRAlignCh" val="l"/>
-            <dgm:param type="parTxRTLAlign" val="r"/>
-            <dgm:param type="shpTxRTLAlignCh" val="r"/>
-          </dgm:alg>
-          <dgm:shape xmlns:r="http://schemas.openxmlformats.org/officeDocument/2006/relationships" type="rect" r:blip="">
-            <dgm:adjLst/>
-          </dgm:shape>
-          <dgm:presOf axis="self" ptType="node"/>
-          <dgm:constrLst>
-            <dgm:constr type="lMarg" refType="h" fact="0.3"/>
-            <dgm:constr type="rMarg" refType="h" fact="0.3"/>
-            <dgm:constr type="tMarg" refType="h" fact="0.3"/>
-            <dgm:constr type="bMarg" refType="h" fact="0.3"/>
-          </dgm:constrLst>
-          <dgm:ruleLst>
-            <dgm:rule type="primFontSz" val="14" fact="NaN" max="NaN"/>
-            <dgm:rule type="h" val="INF" fact="NaN" max="NaN"/>
-          </dgm:ruleLst>
-        </dgm:layoutNode>
-        <dgm:choose name="Name12">
-          <dgm:if name="Name13" axis="ch" ptType="node" func="cnt" op="gte" val="1">
-            <dgm:layoutNode name="desTx" styleLbl="revTx">
-              <dgm:varLst/>
-              <dgm:alg type="tx">
-                <dgm:param type="txAnchorVertCh" val="mid"/>
-                <dgm:param type="parTxLTRAlign" val="l"/>
-                <dgm:param type="shpTxLTRAlignCh" val="l"/>
-                <dgm:param type="parTxRTLAlign" val="r"/>
-                <dgm:param type="shpTxRTLAlignCh" val="r"/>
-                <dgm:param type="stBulletLvl" val="0"/>
+      </dgm:layoutNode>
+      <dgm:forEach name="sibTransForEach" axis="followSib" ptType="sibTrans" cnt="1">
+        <dgm:layoutNode name="sibTrans">
+          <dgm:choose name="Name4">
+            <dgm:if name="Name5" axis="self" func="var" arg="dir" op="equ" val="norm">
+              <dgm:alg type="conn">
+                <dgm:param type="connRout" val="bend"/>
+                <dgm:param type="dim" val="1D"/>
+                <dgm:param type="begPts" val="midR bCtr"/>
+                <dgm:param type="endPts" val="midL tCtr"/>
               </dgm:alg>
-              <dgm:shape xmlns:r="http://schemas.openxmlformats.org/officeDocument/2006/relationships" type="rect" r:blip="">
-                <dgm:adjLst/>
-              </dgm:shape>
-              <dgm:presOf axis="des" ptType="node"/>
-              <dgm:constrLst>
-                <dgm:constr type="primFontSz" val="18"/>
-                <dgm:constr type="secFontSz" refType="primFontSz"/>
-                <dgm:constr type="lMarg" refType="h" fact="0.3"/>
-                <dgm:constr type="rMarg" refType="h" fact="0.3"/>
-                <dgm:constr type="tMarg" refType="h" fact="0.3"/>
-                <dgm:constr type="bMarg" refType="h" fact="0.3"/>
-              </dgm:constrLst>
-              <dgm:ruleLst>
-                <dgm:rule type="primFontSz" val="11" fact="NaN" max="NaN"/>
-              </dgm:ruleLst>
-            </dgm:layoutNode>
-          </dgm:if>
-          <dgm:else name="Name14"/>
-        </dgm:choose>
-      </dgm:layoutNode>
-      <dgm:forEach name="Name15" axis="followSib" ptType="sibTrans" cnt="1">
-        <dgm:layoutNode name="sibTrans">
-          <dgm:alg type="sp"/>
-          <dgm:shape xmlns:r="http://schemas.openxmlformats.org/officeDocument/2006/relationships" r:blip="">
+            </dgm:if>
+            <dgm:else name="Name6">
+              <dgm:alg type="conn">
+                <dgm:param type="connRout" val="bend"/>
+                <dgm:param type="dim" val="1D"/>
+                <dgm:param type="begPts" val="midL bCtr"/>
+                <dgm:param type="endPts" val="midR tCtr"/>
+              </dgm:alg>
+            </dgm:else>
+          </dgm:choose>
+          <dgm:shape xmlns:r="http://schemas.openxmlformats.org/officeDocument/2006/relationships" type="conn" r:blip="" zOrderOff="-2">
             <dgm:adjLst/>
           </dgm:shape>
           <dgm:presOf axis="self"/>
-          <dgm:constrLst/>
+          <dgm:constrLst>
+            <dgm:constr type="begPad" val="-0.05"/>
+            <dgm:constr type="endPad" val="0.9"/>
+            <dgm:constr type="userA" for="ch" refType="connDist"/>
+          </dgm:constrLst>
           <dgm:ruleLst/>
+          <dgm:layoutNode name="connectorText">
+            <dgm:alg type="tx">
+              <dgm:param type="autoTxRot" val="upr"/>
+            </dgm:alg>
+            <dgm:shape xmlns:r="http://schemas.openxmlformats.org/officeDocument/2006/relationships" type="rect" r:blip="" hideGeom="1">
+              <dgm:adjLst/>
+            </dgm:shape>
+            <dgm:presOf axis="self"/>
+            <dgm:constrLst>
+              <dgm:constr type="userA"/>
+              <dgm:constr type="userB"/>
+              <dgm:constr type="w" refType="userA" fact="0.05"/>
+              <dgm:constr type="h" refType="userB" fact="0.01"/>
+              <dgm:constr type="lMarg" val="1"/>
+              <dgm:constr type="rMarg" val="1"/>
+              <dgm:constr type="tMarg"/>
+              <dgm:constr type="bMarg"/>
+            </dgm:constrLst>
+            <dgm:ruleLst>
+              <dgm:rule type="w" val="NaN" fact="0.6" max="NaN"/>
+              <dgm:rule type="h" val="NaN" fact="0.6" max="NaN"/>
+              <dgm:rule type="primFontSz" val="5" fact="NaN" max="NaN"/>
+            </dgm:ruleLst>
+          </dgm:layoutNode>
         </dgm:layoutNode>
       </dgm:forEach>
     </dgm:forEach>
   </dgm:layoutNode>
-  <dgm:extLst>
-    <a:ext uri="{68A01E43-0DF5-4B5B-8FA6-DAF915123BFB}">
-      <dgm1612:lstStyle xmlns:dgm1612="http://schemas.microsoft.com/office/drawing/2016/12/diagram">
-        <a:lvl1pPr>
-          <a:lnSpc>
-            <a:spcPct val="100000"/>
-          </a:lnSpc>
-        </a:lvl1pPr>
-        <a:lvl2pPr>
-          <a:lnSpc>
-            <a:spcPct val="100000"/>
-          </a:lnSpc>
-        </a:lvl2pPr>
-      </dgm1612:lstStyle>
-    </a:ext>
-  </dgm:extLst>
 </dgm:layoutDef>
 </file>
 
@@ -19736,7 +19421,7 @@
           <a:p>
             <a:fld id="{5BCAD085-E8A6-8845-BD4E-CB4CCA059FC4}" type="datetimeFigureOut">
               <a:rPr lang="en-US" smtClean="0"/>
-              <a:t>4/13/2026</a:t>
+              <a:t>4/14/2026</a:t>
             </a:fld>
             <a:endParaRPr lang="en-US"/>
           </a:p>
@@ -19904,7 +19589,7 @@
           <a:p>
             <a:fld id="{5BCAD085-E8A6-8845-BD4E-CB4CCA059FC4}" type="datetimeFigureOut">
               <a:rPr lang="en-US" smtClean="0"/>
-              <a:t>4/13/2026</a:t>
+              <a:t>4/14/2026</a:t>
             </a:fld>
             <a:endParaRPr lang="en-US"/>
           </a:p>
@@ -20082,7 +19767,7 @@
           <a:p>
             <a:fld id="{5BCAD085-E8A6-8845-BD4E-CB4CCA059FC4}" type="datetimeFigureOut">
               <a:rPr lang="en-US" smtClean="0"/>
-              <a:t>4/13/2026</a:t>
+              <a:t>4/14/2026</a:t>
             </a:fld>
             <a:endParaRPr lang="en-US"/>
           </a:p>
@@ -20250,7 +19935,7 @@
           <a:p>
             <a:fld id="{5BCAD085-E8A6-8845-BD4E-CB4CCA059FC4}" type="datetimeFigureOut">
               <a:rPr lang="en-US" smtClean="0"/>
-              <a:t>4/13/2026</a:t>
+              <a:t>4/14/2026</a:t>
             </a:fld>
             <a:endParaRPr lang="en-US"/>
           </a:p>
@@ -20495,7 +20180,7 @@
           <a:p>
             <a:fld id="{5BCAD085-E8A6-8845-BD4E-CB4CCA059FC4}" type="datetimeFigureOut">
               <a:rPr lang="en-US" smtClean="0"/>
-              <a:t>4/13/2026</a:t>
+              <a:t>4/14/2026</a:t>
             </a:fld>
             <a:endParaRPr lang="en-US"/>
           </a:p>
@@ -20780,7 +20465,7 @@
           <a:p>
             <a:fld id="{5BCAD085-E8A6-8845-BD4E-CB4CCA059FC4}" type="datetimeFigureOut">
               <a:rPr lang="en-US" smtClean="0"/>
-              <a:t>4/13/2026</a:t>
+              <a:t>4/14/2026</a:t>
             </a:fld>
             <a:endParaRPr lang="en-US"/>
           </a:p>
@@ -21199,7 +20884,7 @@
           <a:p>
             <a:fld id="{5BCAD085-E8A6-8845-BD4E-CB4CCA059FC4}" type="datetimeFigureOut">
               <a:rPr lang="en-US" smtClean="0"/>
-              <a:t>4/13/2026</a:t>
+              <a:t>4/14/2026</a:t>
             </a:fld>
             <a:endParaRPr lang="en-US"/>
           </a:p>
@@ -21316,7 +21001,7 @@
           <a:p>
             <a:fld id="{5BCAD085-E8A6-8845-BD4E-CB4CCA059FC4}" type="datetimeFigureOut">
               <a:rPr lang="en-US" smtClean="0"/>
-              <a:t>4/13/2026</a:t>
+              <a:t>4/14/2026</a:t>
             </a:fld>
             <a:endParaRPr lang="en-US"/>
           </a:p>
@@ -21411,7 +21096,7 @@
           <a:p>
             <a:fld id="{5BCAD085-E8A6-8845-BD4E-CB4CCA059FC4}" type="datetimeFigureOut">
               <a:rPr lang="en-US" smtClean="0"/>
-              <a:t>4/13/2026</a:t>
+              <a:t>4/14/2026</a:t>
             </a:fld>
             <a:endParaRPr lang="en-US"/>
           </a:p>
@@ -21686,7 +21371,7 @@
           <a:p>
             <a:fld id="{5BCAD085-E8A6-8845-BD4E-CB4CCA059FC4}" type="datetimeFigureOut">
               <a:rPr lang="en-US" smtClean="0"/>
-              <a:t>4/13/2026</a:t>
+              <a:t>4/14/2026</a:t>
             </a:fld>
             <a:endParaRPr lang="en-US"/>
           </a:p>
@@ -21938,7 +21623,7 @@
           <a:p>
             <a:fld id="{5BCAD085-E8A6-8845-BD4E-CB4CCA059FC4}" type="datetimeFigureOut">
               <a:rPr lang="en-US" smtClean="0"/>
-              <a:t>4/13/2026</a:t>
+              <a:t>4/14/2026</a:t>
             </a:fld>
             <a:endParaRPr lang="en-US"/>
           </a:p>
@@ -22149,7 +21834,7 @@
           <a:p>
             <a:fld id="{5BCAD085-E8A6-8845-BD4E-CB4CCA059FC4}" type="datetimeFigureOut">
               <a:rPr lang="en-US" smtClean="0"/>
-              <a:t>4/13/2026</a:t>
+              <a:t>4/14/2026</a:t>
             </a:fld>
             <a:endParaRPr lang="en-US"/>
           </a:p>
@@ -23072,7 +22757,7 @@
               <a:buChar char="•"/>
             </a:pPr>
             <a:r>
-              <a:rPr lang="en-US" sz="1700">
+              <a:rPr lang="en-US" sz="1700" dirty="0">
                 <a:solidFill>
                   <a:schemeClr val="tx1"/>
                 </a:solidFill>
@@ -23088,7 +22773,7 @@
               <a:buFont typeface="Arial" panose="020B0604020202020204" pitchFamily="34" charset="0"/>
               <a:buChar char="•"/>
             </a:pPr>
-            <a:endParaRPr lang="en-US" sz="1700">
+            <a:endParaRPr lang="en-US" sz="1700" dirty="0">
               <a:solidFill>
                 <a:schemeClr val="tx1"/>
               </a:solidFill>
@@ -23103,63 +22788,111 @@
               <a:buChar char="•"/>
             </a:pPr>
             <a:r>
-              <a:rPr lang="en-US" sz="1700">
+              <a:rPr lang="en-US" sz="1700" dirty="0">
                 <a:solidFill>
                   <a:schemeClr val="tx1"/>
                 </a:solidFill>
               </a:rPr>
-              <a:t>Paper Presentation by:</a:t>
+              <a:t>Paper Presentation by Author’s :</a:t>
             </a:r>
           </a:p>
           <a:p>
-            <a:pPr indent="-228600" algn="l" defTabSz="914400">
+            <a:pPr algn="l" defTabSz="914400">
               <a:lnSpc>
                 <a:spcPct val="90000"/>
               </a:lnSpc>
-              <a:buFont typeface="Arial" panose="020B0604020202020204" pitchFamily="34" charset="0"/>
-              <a:buChar char="•"/>
             </a:pPr>
             <a:r>
-              <a:rPr lang="en-US" sz="1700">
+              <a:rPr lang="en-US" sz="1700" dirty="0">
                 <a:solidFill>
                   <a:schemeClr val="tx1"/>
                 </a:solidFill>
               </a:rPr>
-              <a:t>1. Mrs. Neha J K (Faculty Author)</a:t>
+              <a:t>1. Mrs. Neha J K </a:t>
             </a:r>
           </a:p>
           <a:p>
-            <a:pPr indent="-228600" algn="l" defTabSz="914400">
+            <a:pPr algn="l" defTabSz="914400">
               <a:lnSpc>
                 <a:spcPct val="90000"/>
               </a:lnSpc>
-              <a:buFont typeface="Arial" panose="020B0604020202020204" pitchFamily="34" charset="0"/>
-              <a:buChar char="•"/>
             </a:pPr>
             <a:r>
-              <a:rPr lang="en-US" sz="1700">
+              <a:rPr lang="en-US" sz="1700" dirty="0">
                 <a:solidFill>
                   <a:schemeClr val="tx1"/>
                 </a:solidFill>
               </a:rPr>
-              <a:t>2. Arshad Pasha (Student Author)</a:t>
+              <a:t>(Assistant Professor )</a:t>
             </a:r>
           </a:p>
           <a:p>
-            <a:pPr indent="-228600" algn="l" defTabSz="914400">
+            <a:pPr algn="l" defTabSz="914400">
               <a:lnSpc>
                 <a:spcPct val="90000"/>
               </a:lnSpc>
-              <a:buFont typeface="Arial" panose="020B0604020202020204" pitchFamily="34" charset="0"/>
-              <a:buChar char="•"/>
             </a:pPr>
             <a:r>
-              <a:rPr lang="en-US" sz="1700">
+              <a:rPr lang="en-US" sz="1700" dirty="0">
                 <a:solidFill>
                   <a:schemeClr val="tx1"/>
                 </a:solidFill>
               </a:rPr>
-              <a:t>Seshadripuram Degree College, Mysuru</a:t>
+              <a:t>2. Arshad Pasha</a:t>
+            </a:r>
+          </a:p>
+          <a:p>
+            <a:pPr algn="l" defTabSz="914400">
+              <a:lnSpc>
+                <a:spcPct val="90000"/>
+              </a:lnSpc>
+            </a:pPr>
+            <a:r>
+              <a:rPr lang="en-US" sz="1700" dirty="0">
+                <a:solidFill>
+                  <a:schemeClr val="tx1"/>
+                </a:solidFill>
+              </a:rPr>
+              <a:t> (Final Year BCA-’</a:t>
+            </a:r>
+            <a:r>
+              <a:rPr lang="en-US" sz="1700" dirty="0" err="1">
+                <a:solidFill>
+                  <a:schemeClr val="tx1"/>
+                </a:solidFill>
+              </a:rPr>
+              <a:t>A’Sec</a:t>
+            </a:r>
+            <a:r>
+              <a:rPr lang="en-US" sz="1700" dirty="0">
+                <a:solidFill>
+                  <a:schemeClr val="tx1"/>
+                </a:solidFill>
+              </a:rPr>
+              <a:t> )</a:t>
+            </a:r>
+          </a:p>
+          <a:p>
+            <a:pPr algn="l" defTabSz="914400">
+              <a:lnSpc>
+                <a:spcPct val="90000"/>
+              </a:lnSpc>
+            </a:pPr>
+            <a:r>
+              <a:rPr lang="en-US" sz="1700" dirty="0" err="1">
+                <a:solidFill>
+                  <a:schemeClr val="tx1"/>
+                </a:solidFill>
+              </a:rPr>
+              <a:t>Seshadripuram</a:t>
+            </a:r>
+            <a:r>
+              <a:rPr lang="en-US" sz="1700" dirty="0">
+                <a:solidFill>
+                  <a:schemeClr val="tx1"/>
+                </a:solidFill>
+              </a:rPr>
+              <a:t> Degree College, Mysuru</a:t>
             </a:r>
           </a:p>
         </p:txBody>
@@ -43445,106 +43178,6 @@
 <file path=ppt/slides/slide6.xml><?xml version="1.0" encoding="utf-8"?>
 <p:sld xmlns:a="http://schemas.openxmlformats.org/drawingml/2006/main" xmlns:r="http://schemas.openxmlformats.org/officeDocument/2006/relationships" xmlns:p="http://schemas.openxmlformats.org/presentationml/2006/main">
   <p:cSld>
-    <p:spTree>
-      <p:nvGrpSpPr>
-        <p:cNvPr id="1" name=""/>
-        <p:cNvGrpSpPr/>
-        <p:nvPr/>
-      </p:nvGrpSpPr>
-      <p:grpSpPr>
-        <a:xfrm>
-          <a:off x="0" y="0"/>
-          <a:ext cx="0" cy="0"/>
-          <a:chOff x="0" y="0"/>
-          <a:chExt cx="0" cy="0"/>
-        </a:xfrm>
-      </p:grpSpPr>
-      <p:sp>
-        <p:nvSpPr>
-          <p:cNvPr id="2" name="Title 1"/>
-          <p:cNvSpPr>
-            <a:spLocks noGrp="1"/>
-          </p:cNvSpPr>
-          <p:nvPr>
-            <p:ph type="title"/>
-          </p:nvPr>
-        </p:nvSpPr>
-        <p:spPr/>
-        <p:txBody>
-          <a:bodyPr/>
-          <a:lstStyle/>
-          <a:p>
-            <a:r>
-              <a:rPr dirty="0"/>
-              <a:t>4. Research Methodology &amp; Architecture</a:t>
-            </a:r>
-          </a:p>
-        </p:txBody>
-      </p:sp>
-      <p:sp>
-        <p:nvSpPr>
-          <p:cNvPr id="3" name="TextBox 2"/>
-          <p:cNvSpPr txBox="1"/>
-          <p:nvPr/>
-        </p:nvSpPr>
-        <p:spPr>
-          <a:xfrm>
-            <a:off x="776286" y="1417638"/>
-            <a:ext cx="7315200" cy="923330"/>
-          </a:xfrm>
-          <a:prstGeom prst="rect">
-            <a:avLst/>
-          </a:prstGeom>
-          <a:noFill/>
-        </p:spPr>
-        <p:txBody>
-          <a:bodyPr wrap="square">
-            <a:spAutoFit/>
-          </a:bodyPr>
-          <a:lstStyle/>
-          <a:p>
-            <a:r>
-              <a:rPr dirty="0"/>
-              <a:t>Built using Rapid Agile Development with a serverless macro-stack prioritizing real-time processing (Next.js 15, Firebase NoSQL, Tailwind CSS, Resend API).</a:t>
-            </a:r>
-          </a:p>
-        </p:txBody>
-      </p:sp>
-      <p:pic>
-        <p:nvPicPr>
-          <p:cNvPr id="4" name="Picture 3" descr="image.png"/>
-          <p:cNvPicPr>
-            <a:picLocks noChangeAspect="1"/>
-          </p:cNvPicPr>
-          <p:nvPr/>
-        </p:nvPicPr>
-        <p:blipFill>
-          <a:blip r:embed="rId2"/>
-          <a:stretch>
-            <a:fillRect/>
-          </a:stretch>
-        </p:blipFill>
-        <p:spPr>
-          <a:xfrm>
-            <a:off x="2166938" y="1981201"/>
-            <a:ext cx="4810124" cy="4810124"/>
-          </a:xfrm>
-          <a:prstGeom prst="rect">
-            <a:avLst/>
-          </a:prstGeom>
-        </p:spPr>
-      </p:pic>
-    </p:spTree>
-  </p:cSld>
-  <p:clrMapOvr>
-    <a:masterClrMapping/>
-  </p:clrMapOvr>
-</p:sld>
-</file>
-
-<file path=ppt/slides/slide7.xml><?xml version="1.0" encoding="utf-8"?>
-<p:sld xmlns:a="http://schemas.openxmlformats.org/drawingml/2006/main" xmlns:r="http://schemas.openxmlformats.org/officeDocument/2006/relationships" xmlns:p="http://schemas.openxmlformats.org/presentationml/2006/main">
-  <p:cSld>
     <p:bg>
       <p:bgPr>
         <a:solidFill>
@@ -43569,10 +43202,10 @@
       </p:grpSpPr>
       <p:sp useBgFill="1">
         <p:nvSpPr>
-          <p:cNvPr id="18" name="Rectangle 17">
+          <p:cNvPr id="1033" name="Rectangle 1032">
             <a:extLst>
               <a:ext uri="{FF2B5EF4-FFF2-40B4-BE49-F238E27FC236}">
-                <a16:creationId xmlns:a16="http://schemas.microsoft.com/office/drawing/2014/main" id="{53B021B3-DE93-4AB7-8A18-CF5F1CED88B8}"/>
+                <a16:creationId xmlns:a16="http://schemas.microsoft.com/office/drawing/2014/main" id="{2B97F24A-32CE-4C1C-A50D-3016B394DCFB}"/>
               </a:ext>
               <a:ext uri="{C183D7F6-B498-43B3-948B-1728B52AA6E4}">
                 <adec:decorative xmlns:adec="http://schemas.microsoft.com/office/drawing/2017/decorative" val="1"/>
@@ -43639,29 +43272,41 @@
         </p:nvSpPr>
         <p:spPr>
           <a:xfrm>
-            <a:off x="630936" y="256032"/>
-            <a:ext cx="7879842" cy="1014984"/>
+            <a:off x="473202" y="639520"/>
+            <a:ext cx="2571750" cy="1719072"/>
           </a:xfrm>
         </p:spPr>
         <p:txBody>
-          <a:bodyPr anchor="b">
+          <a:bodyPr vert="horz" lIns="91440" tIns="45720" rIns="91440" bIns="45720" rtlCol="0" anchor="b">
             <a:normAutofit/>
           </a:bodyPr>
           <a:lstStyle/>
           <a:p>
+            <a:pPr algn="l" defTabSz="914400">
+              <a:lnSpc>
+                <a:spcPct val="90000"/>
+              </a:lnSpc>
+            </a:pPr>
             <a:r>
-              <a:rPr lang="en-US"/>
-              <a:t>5. Objectives of the Study</a:t>
+              <a:rPr lang="en-US" sz="2900" kern="1200">
+                <a:solidFill>
+                  <a:schemeClr val="tx1"/>
+                </a:solidFill>
+                <a:latin typeface="+mj-lt"/>
+                <a:ea typeface="+mj-ea"/>
+                <a:cs typeface="+mj-cs"/>
+              </a:rPr>
+              <a:t>4. Research Methodology &amp; Architecture</a:t>
             </a:r>
           </a:p>
         </p:txBody>
       </p:sp>
       <p:sp>
         <p:nvSpPr>
-          <p:cNvPr id="19" name="Rectangle 18">
+          <p:cNvPr id="1035" name="sketch line">
             <a:extLst>
               <a:ext uri="{FF2B5EF4-FFF2-40B4-BE49-F238E27FC236}">
-                <a16:creationId xmlns:a16="http://schemas.microsoft.com/office/drawing/2014/main" id="{52D502E5-F6B4-4D58-B4AE-FC466FF15EE8}"/>
+                <a16:creationId xmlns:a16="http://schemas.microsoft.com/office/drawing/2014/main" id="{CD8B4F24-440B-49E9-B85D-733523DC064B}"/>
               </a:ext>
               <a:ext uri="{C183D7F6-B498-43B3-948B-1728B52AA6E4}">
                 <adec:decorative xmlns:adec="http://schemas.microsoft.com/office/drawing/2017/decorative" val="1"/>
@@ -43681,19 +43326,208 @@
         </p:nvSpPr>
         <p:spPr>
           <a:xfrm>
-            <a:off x="649464" y="1634502"/>
-            <a:ext cx="7838694" cy="18288"/>
+            <a:off x="482458" y="2573756"/>
+            <a:ext cx="2441321" cy="18288"/>
           </a:xfrm>
-          <a:prstGeom prst="rect">
+          <a:custGeom>
             <a:avLst/>
-          </a:prstGeom>
+            <a:gdLst>
+              <a:gd name="csX0" fmla="*/ 0 w 2441321"/>
+              <a:gd name="csY0" fmla="*/ 0 h 18288"/>
+              <a:gd name="csX1" fmla="*/ 585917 w 2441321"/>
+              <a:gd name="csY1" fmla="*/ 0 h 18288"/>
+              <a:gd name="csX2" fmla="*/ 1196247 w 2441321"/>
+              <a:gd name="csY2" fmla="*/ 0 h 18288"/>
+              <a:gd name="csX3" fmla="*/ 1806578 w 2441321"/>
+              <a:gd name="csY3" fmla="*/ 0 h 18288"/>
+              <a:gd name="csX4" fmla="*/ 2441321 w 2441321"/>
+              <a:gd name="csY4" fmla="*/ 0 h 18288"/>
+              <a:gd name="csX5" fmla="*/ 2441321 w 2441321"/>
+              <a:gd name="csY5" fmla="*/ 18288 h 18288"/>
+              <a:gd name="csX6" fmla="*/ 1830991 w 2441321"/>
+              <a:gd name="csY6" fmla="*/ 18288 h 18288"/>
+              <a:gd name="csX7" fmla="*/ 1269487 w 2441321"/>
+              <a:gd name="csY7" fmla="*/ 18288 h 18288"/>
+              <a:gd name="csX8" fmla="*/ 707983 w 2441321"/>
+              <a:gd name="csY8" fmla="*/ 18288 h 18288"/>
+              <a:gd name="csX9" fmla="*/ 0 w 2441321"/>
+              <a:gd name="csY9" fmla="*/ 18288 h 18288"/>
+              <a:gd name="csX10" fmla="*/ 0 w 2441321"/>
+              <a:gd name="csY10" fmla="*/ 0 h 18288"/>
+            </a:gdLst>
+            <a:ahLst/>
+            <a:cxnLst>
+              <a:cxn ang="0">
+                <a:pos x="csX0" y="csY0"/>
+              </a:cxn>
+              <a:cxn ang="0">
+                <a:pos x="csX1" y="csY1"/>
+              </a:cxn>
+              <a:cxn ang="0">
+                <a:pos x="csX2" y="csY2"/>
+              </a:cxn>
+              <a:cxn ang="0">
+                <a:pos x="csX3" y="csY3"/>
+              </a:cxn>
+              <a:cxn ang="0">
+                <a:pos x="csX4" y="csY4"/>
+              </a:cxn>
+              <a:cxn ang="0">
+                <a:pos x="csX5" y="csY5"/>
+              </a:cxn>
+              <a:cxn ang="0">
+                <a:pos x="csX6" y="csY6"/>
+              </a:cxn>
+              <a:cxn ang="0">
+                <a:pos x="csX7" y="csY7"/>
+              </a:cxn>
+              <a:cxn ang="0">
+                <a:pos x="csX8" y="csY8"/>
+              </a:cxn>
+              <a:cxn ang="0">
+                <a:pos x="csX9" y="csY9"/>
+              </a:cxn>
+              <a:cxn ang="0">
+                <a:pos x="csX10" y="csY10"/>
+              </a:cxn>
+            </a:cxnLst>
+            <a:rect l="l" t="t" r="r" b="b"/>
+            <a:pathLst>
+              <a:path w="2441321" h="18288" fill="none" extrusionOk="0">
+                <a:moveTo>
+                  <a:pt x="0" y="0"/>
+                </a:moveTo>
+                <a:cubicBezTo>
+                  <a:pt x="273217" y="-17533"/>
+                  <a:pt x="355785" y="-4171"/>
+                  <a:pt x="585917" y="0"/>
+                </a:cubicBezTo>
+                <a:cubicBezTo>
+                  <a:pt x="816049" y="4171"/>
+                  <a:pt x="991446" y="-9419"/>
+                  <a:pt x="1196247" y="0"/>
+                </a:cubicBezTo>
+                <a:cubicBezTo>
+                  <a:pt x="1401048" y="9419"/>
+                  <a:pt x="1589984" y="-731"/>
+                  <a:pt x="1806578" y="0"/>
+                </a:cubicBezTo>
+                <a:cubicBezTo>
+                  <a:pt x="2023172" y="731"/>
+                  <a:pt x="2247754" y="8393"/>
+                  <a:pt x="2441321" y="0"/>
+                </a:cubicBezTo>
+                <a:cubicBezTo>
+                  <a:pt x="2441167" y="8655"/>
+                  <a:pt x="2440437" y="9975"/>
+                  <a:pt x="2441321" y="18288"/>
+                </a:cubicBezTo>
+                <a:cubicBezTo>
+                  <a:pt x="2169723" y="30506"/>
+                  <a:pt x="2045712" y="39140"/>
+                  <a:pt x="1830991" y="18288"/>
+                </a:cubicBezTo>
+                <a:cubicBezTo>
+                  <a:pt x="1616270" y="-2564"/>
+                  <a:pt x="1505876" y="3949"/>
+                  <a:pt x="1269487" y="18288"/>
+                </a:cubicBezTo>
+                <a:cubicBezTo>
+                  <a:pt x="1033098" y="32627"/>
+                  <a:pt x="908661" y="41191"/>
+                  <a:pt x="707983" y="18288"/>
+                </a:cubicBezTo>
+                <a:cubicBezTo>
+                  <a:pt x="507305" y="-4615"/>
+                  <a:pt x="333592" y="20759"/>
+                  <a:pt x="0" y="18288"/>
+                </a:cubicBezTo>
+                <a:cubicBezTo>
+                  <a:pt x="-688" y="11716"/>
+                  <a:pt x="875" y="6357"/>
+                  <a:pt x="0" y="0"/>
+                </a:cubicBezTo>
+                <a:close/>
+              </a:path>
+              <a:path w="2441321" h="18288" stroke="0" extrusionOk="0">
+                <a:moveTo>
+                  <a:pt x="0" y="0"/>
+                </a:moveTo>
+                <a:cubicBezTo>
+                  <a:pt x="207071" y="-14617"/>
+                  <a:pt x="444194" y="-15606"/>
+                  <a:pt x="585917" y="0"/>
+                </a:cubicBezTo>
+                <a:cubicBezTo>
+                  <a:pt x="727640" y="15606"/>
+                  <a:pt x="904326" y="-79"/>
+                  <a:pt x="1123008" y="0"/>
+                </a:cubicBezTo>
+                <a:cubicBezTo>
+                  <a:pt x="1341690" y="79"/>
+                  <a:pt x="1600014" y="10401"/>
+                  <a:pt x="1782164" y="0"/>
+                </a:cubicBezTo>
+                <a:cubicBezTo>
+                  <a:pt x="1964314" y="-10401"/>
+                  <a:pt x="2143537" y="-21488"/>
+                  <a:pt x="2441321" y="0"/>
+                </a:cubicBezTo>
+                <a:cubicBezTo>
+                  <a:pt x="2441735" y="5928"/>
+                  <a:pt x="2441551" y="11133"/>
+                  <a:pt x="2441321" y="18288"/>
+                </a:cubicBezTo>
+                <a:cubicBezTo>
+                  <a:pt x="2166745" y="28773"/>
+                  <a:pt x="2078726" y="15476"/>
+                  <a:pt x="1879817" y="18288"/>
+                </a:cubicBezTo>
+                <a:cubicBezTo>
+                  <a:pt x="1680908" y="21100"/>
+                  <a:pt x="1548770" y="-4127"/>
+                  <a:pt x="1318313" y="18288"/>
+                </a:cubicBezTo>
+                <a:cubicBezTo>
+                  <a:pt x="1087856" y="40703"/>
+                  <a:pt x="894613" y="3927"/>
+                  <a:pt x="659157" y="18288"/>
+                </a:cubicBezTo>
+                <a:cubicBezTo>
+                  <a:pt x="423701" y="32649"/>
+                  <a:pt x="246611" y="33975"/>
+                  <a:pt x="0" y="18288"/>
+                </a:cubicBezTo>
+                <a:cubicBezTo>
+                  <a:pt x="-348" y="10388"/>
+                  <a:pt x="-12" y="3969"/>
+                  <a:pt x="0" y="0"/>
+                </a:cubicBezTo>
+                <a:close/>
+              </a:path>
+            </a:pathLst>
+          </a:custGeom>
           <a:solidFill>
-            <a:srgbClr val="D5D5D5"/>
+            <a:schemeClr val="accent2"/>
           </a:solidFill>
-          <a:ln w="3175">
-            <a:noFill/>
+          <a:ln w="38100" cap="rnd">
+            <a:solidFill>
+              <a:schemeClr val="accent2"/>
+            </a:solidFill>
+            <a:round/>
+            <a:extLst>
+              <a:ext uri="{C807C97D-BFC1-408E-A445-0C87EB9F89A2}">
+                <ask:lineSketchStyleProps xmlns:ask="http://schemas.microsoft.com/office/drawing/2018/sketchyshapes" sd="1219033472">
+                  <a:prstGeom prst="rect">
+                    <a:avLst/>
+                  </a:prstGeom>
+                  <ask:type>
+                    <ask:lineSketchFreehand/>
+                  </ask:type>
+                </ask:lineSketchStyleProps>
+              </a:ext>
+            </a:extLst>
           </a:ln>
-          <a:effectLst/>
         </p:spPr>
         <p:style>
           <a:lnRef idx="2">
@@ -43716,21 +43550,172 @@
           <a:lstStyle/>
           <a:p>
             <a:pPr algn="ctr"/>
-            <a:endParaRPr lang="en-US">
-              <a:solidFill>
-                <a:prstClr val="white"/>
-              </a:solidFill>
-              <a:latin typeface="Calibri" panose="020F0502020204030204"/>
-            </a:endParaRPr>
+            <a:endParaRPr lang="en-US"/>
           </a:p>
         </p:txBody>
       </p:sp>
       <p:sp>
         <p:nvSpPr>
-          <p:cNvPr id="13" name="Rectangle 12">
+          <p:cNvPr id="3" name="TextBox 2"/>
+          <p:cNvSpPr txBox="1"/>
+          <p:nvPr/>
+        </p:nvSpPr>
+        <p:spPr>
+          <a:xfrm>
+            <a:off x="473202" y="2807208"/>
+            <a:ext cx="2571750" cy="3410712"/>
+          </a:xfrm>
+          <a:prstGeom prst="rect">
+            <a:avLst/>
+          </a:prstGeom>
+        </p:spPr>
+        <p:txBody>
+          <a:bodyPr vert="horz" lIns="91440" tIns="45720" rIns="91440" bIns="45720" rtlCol="0" anchor="t">
+            <a:normAutofit/>
+          </a:bodyPr>
+          <a:lstStyle/>
+          <a:p>
+            <a:pPr indent="-228600" defTabSz="914400">
+              <a:lnSpc>
+                <a:spcPct val="90000"/>
+              </a:lnSpc>
+              <a:spcAft>
+                <a:spcPts val="600"/>
+              </a:spcAft>
+              <a:buFont typeface="Arial" panose="020B0604020202020204" pitchFamily="34" charset="0"/>
+              <a:buChar char="•"/>
+            </a:pPr>
+            <a:r>
+              <a:rPr lang="en-US" sz="1900"/>
+              <a:t>Built using Rapid Agile Development with a serverless macro-stack prioritizing real-time processing (Next.js 15, Firebase NoSQL, Tailwind CSS, Resend API).</a:t>
+            </a:r>
+          </a:p>
+        </p:txBody>
+      </p:sp>
+      <p:pic>
+        <p:nvPicPr>
+          <p:cNvPr id="1028" name="Picture 4" descr="System Architecture Diagram">
             <a:extLst>
               <a:ext uri="{FF2B5EF4-FFF2-40B4-BE49-F238E27FC236}">
-                <a16:creationId xmlns:a16="http://schemas.microsoft.com/office/drawing/2014/main" id="{9DECDBF4-02B6-4BB4-B65B-B8107AD6A9E8}"/>
+                <a16:creationId xmlns:a16="http://schemas.microsoft.com/office/drawing/2014/main" id="{0CFEAE4D-FF9D-73A3-66D7-B41316C788C0}"/>
+              </a:ext>
+            </a:extLst>
+          </p:cNvPr>
+          <p:cNvPicPr>
+            <a:picLocks noChangeAspect="1" noChangeArrowheads="1"/>
+          </p:cNvPicPr>
+          <p:nvPr/>
+        </p:nvPicPr>
+        <p:blipFill>
+          <a:blip r:embed="rId2">
+            <a:extLst>
+              <a:ext uri="{28A0092B-C50C-407E-A947-70E740481C1C}">
+                <a14:useLocalDpi xmlns:a14="http://schemas.microsoft.com/office/drawing/2010/main" val="0"/>
+              </a:ext>
+            </a:extLst>
+          </a:blip>
+          <a:stretch>
+            <a:fillRect/>
+          </a:stretch>
+        </p:blipFill>
+        <p:spPr bwMode="auto">
+          <a:xfrm>
+            <a:off x="3490722" y="840105"/>
+            <a:ext cx="5177790" cy="5177790"/>
+          </a:xfrm>
+          <a:prstGeom prst="rect">
+            <a:avLst/>
+          </a:prstGeom>
+          <a:noFill/>
+          <a:extLst>
+            <a:ext uri="{909E8E84-426E-40DD-AFC4-6F175D3DCCD1}">
+              <a14:hiddenFill xmlns:a14="http://schemas.microsoft.com/office/drawing/2010/main">
+                <a:solidFill>
+                  <a:srgbClr val="FFFFFF"/>
+                </a:solidFill>
+              </a14:hiddenFill>
+            </a:ext>
+          </a:extLst>
+        </p:spPr>
+      </p:pic>
+    </p:spTree>
+  </p:cSld>
+  <p:clrMapOvr>
+    <a:masterClrMapping/>
+  </p:clrMapOvr>
+</p:sld>
+</file>
+
+<file path=ppt/slides/slide7.xml><?xml version="1.0" encoding="utf-8"?>
+<p:sld xmlns:a="http://schemas.openxmlformats.org/drawingml/2006/main" xmlns:r="http://schemas.openxmlformats.org/officeDocument/2006/relationships" xmlns:p="http://schemas.openxmlformats.org/presentationml/2006/main">
+  <p:cSld>
+    <p:bg>
+      <p:bgPr>
+        <a:solidFill>
+          <a:schemeClr val="bg1"/>
+        </a:solidFill>
+        <a:effectLst/>
+      </p:bgPr>
+    </p:bg>
+    <p:spTree>
+      <p:nvGrpSpPr>
+        <p:cNvPr id="1" name=""/>
+        <p:cNvGrpSpPr/>
+        <p:nvPr/>
+      </p:nvGrpSpPr>
+      <p:grpSpPr>
+        <a:xfrm>
+          <a:off x="0" y="0"/>
+          <a:ext cx="0" cy="0"/>
+          <a:chOff x="0" y="0"/>
+          <a:chExt cx="0" cy="0"/>
+        </a:xfrm>
+      </p:grpSpPr>
+      <p:pic>
+        <p:nvPicPr>
+          <p:cNvPr id="22" name="Picture 21">
+            <a:extLst>
+              <a:ext uri="{FF2B5EF4-FFF2-40B4-BE49-F238E27FC236}">
+                <a16:creationId xmlns:a16="http://schemas.microsoft.com/office/drawing/2014/main" id="{B57A6DE3-C1CE-83F6-A07A-724FD0233399}"/>
+              </a:ext>
+            </a:extLst>
+          </p:cNvPr>
+          <p:cNvPicPr>
+            <a:picLocks noChangeAspect="1"/>
+          </p:cNvPicPr>
+          <p:nvPr/>
+        </p:nvPicPr>
+        <p:blipFill>
+          <a:blip r:embed="rId2">
+            <a:duotone>
+              <a:schemeClr val="bg2">
+                <a:shade val="45000"/>
+                <a:satMod val="135000"/>
+              </a:schemeClr>
+              <a:prstClr val="white"/>
+            </a:duotone>
+          </a:blip>
+          <a:srcRect l="5217" r="14783"/>
+          <a:stretch>
+            <a:fillRect/>
+          </a:stretch>
+        </p:blipFill>
+        <p:spPr>
+          <a:xfrm>
+            <a:off x="20" y="10"/>
+            <a:ext cx="9143980" cy="6857990"/>
+          </a:xfrm>
+          <a:prstGeom prst="rect">
+            <a:avLst/>
+          </a:prstGeom>
+        </p:spPr>
+      </p:pic>
+      <p:sp>
+        <p:nvSpPr>
+          <p:cNvPr id="26" name="Rectangle 25">
+            <a:extLst>
+              <a:ext uri="{FF2B5EF4-FFF2-40B4-BE49-F238E27FC236}">
+                <a16:creationId xmlns:a16="http://schemas.microsoft.com/office/drawing/2014/main" id="{B50AB553-2A96-4A92-96F2-93548E096954}"/>
               </a:ext>
               <a:ext uri="{C183D7F6-B498-43B3-948B-1728B52AA6E4}">
                 <adec:decorative xmlns:adec="http://schemas.microsoft.com/office/drawing/2017/decorative" val="1"/>
@@ -43749,16 +43734,30 @@
           </p:nvPr>
         </p:nvSpPr>
         <p:spPr>
-          <a:xfrm flipV="1">
-            <a:off x="630936" y="1538176"/>
-            <a:ext cx="1405092" cy="109814"/>
+          <a:xfrm>
+            <a:off x="0" y="0"/>
+            <a:ext cx="9144000" cy="6858000"/>
           </a:xfrm>
           <a:prstGeom prst="rect">
             <a:avLst/>
           </a:prstGeom>
-          <a:solidFill>
-            <a:schemeClr val="accent2"/>
-          </a:solidFill>
+          <a:gradFill>
+            <a:gsLst>
+              <a:gs pos="10000">
+                <a:schemeClr val="bg2">
+                  <a:alpha val="68000"/>
+                </a:schemeClr>
+              </a:gs>
+              <a:gs pos="85000">
+                <a:schemeClr val="bg2">
+                  <a:alpha val="97000"/>
+                </a:schemeClr>
+              </a:gs>
+            </a:gsLst>
+            <a:path path="circle">
+              <a:fillToRect l="50000" t="50000" r="50000" b="50000"/>
+            </a:path>
+          </a:gradFill>
           <a:ln>
             <a:noFill/>
           </a:ln>
@@ -43784,12 +43783,36 @@
           <a:lstStyle/>
           <a:p>
             <a:pPr algn="ctr"/>
-            <a:endParaRPr lang="en-US">
-              <a:solidFill>
-                <a:prstClr val="white"/>
-              </a:solidFill>
-              <a:latin typeface="Calibri" panose="020F0502020204030204"/>
-            </a:endParaRPr>
+            <a:endParaRPr lang="en-US"/>
+          </a:p>
+        </p:txBody>
+      </p:sp>
+      <p:sp>
+        <p:nvSpPr>
+          <p:cNvPr id="2" name="Title 1"/>
+          <p:cNvSpPr>
+            <a:spLocks noGrp="1"/>
+          </p:cNvSpPr>
+          <p:nvPr>
+            <p:ph type="title"/>
+          </p:nvPr>
+        </p:nvSpPr>
+        <p:spPr>
+          <a:xfrm>
+            <a:off x="628650" y="365125"/>
+            <a:ext cx="7886700" cy="1325563"/>
+          </a:xfrm>
+        </p:spPr>
+        <p:txBody>
+          <a:bodyPr>
+            <a:normAutofit/>
+          </a:bodyPr>
+          <a:lstStyle/>
+          <a:p>
+            <a:r>
+              <a:rPr lang="en-US"/>
+              <a:t>5. Objectives of the Study</a:t>
+            </a:r>
           </a:p>
         </p:txBody>
       </p:sp>
@@ -43809,18 +43832,18 @@
             <p:ph idx="1"/>
             <p:extLst>
               <p:ext uri="{D42A27DB-BD31-4B8C-83A1-F6EECF244321}">
-                <p14:modId xmlns:p14="http://schemas.microsoft.com/office/powerpoint/2010/main" val="2350437819"/>
+                <p14:modId xmlns:p14="http://schemas.microsoft.com/office/powerpoint/2010/main" val="2522174884"/>
               </p:ext>
             </p:extLst>
           </p:nvPr>
         </p:nvGraphicFramePr>
         <p:xfrm>
-          <a:off x="628650" y="1926266"/>
-          <a:ext cx="7886700" cy="4357524"/>
+          <a:off x="628650" y="1825625"/>
+          <a:ext cx="7886700" cy="4351338"/>
         </p:xfrm>
         <a:graphic>
           <a:graphicData uri="http://schemas.openxmlformats.org/drawingml/2006/diagram">
-            <dgm:relIds xmlns:dgm="http://schemas.openxmlformats.org/drawingml/2006/diagram" xmlns:r="http://schemas.openxmlformats.org/officeDocument/2006/relationships" r:dm="rId2" r:lo="rId3" r:qs="rId4" r:cs="rId5"/>
+            <dgm:relIds xmlns:dgm="http://schemas.openxmlformats.org/drawingml/2006/diagram" xmlns:r="http://schemas.openxmlformats.org/officeDocument/2006/relationships" r:dm="rId3" r:lo="rId4" r:qs="rId5" r:cs="rId6"/>
           </a:graphicData>
         </a:graphic>
       </p:graphicFrame>
